--- a/Topic_C/Exam_Practice/TC-L07_Speaking_Workshop_Documents_Texts_Digital_Information.pptx
+++ b/Topic_C/Exam_Practice/TC-L07_Speaking_Workshop_Documents_Texts_Digital_Information.pptx
@@ -615,7 +615,11 @@
           <a:lstStyle/>
           <a:p>
             <a:r>
-              <a:rPr lang="en-US" dirty="0"/>
+              <a:rPr lang="ar-SA" dirty="0">
+                <a:latin typeface="Amiri" pitchFamily="2" charset="-78"/>
+                <a:ea typeface="Amiri" pitchFamily="2" charset="-78"/>
+                <a:cs typeface="Amiri" pitchFamily="2" charset="-78"/>
+              </a:rPr>
               <a:t>ROLE PLAY C (Develop) — a booking problem.
 SET-UP IN THE BREAKOUT ROOM: A = examiner (reads the left column ONLY — the questions, in order), B = candidate (sees the task column; Core may use the help column), C = observer (ticks the feedback checklist). 1 minute preparation, about 3 minutes speaking, 1 minute feedback, then rotate.
 Task ! is the unexpected question: in the exam the candidate has not seen it — the examiner should read it without warning.
@@ -707,7 +711,11 @@
           <a:lstStyle/>
           <a:p>
             <a:r>
-              <a:rPr lang="en-US" dirty="0"/>
+              <a:rPr lang="ar-SA" dirty="0">
+                <a:latin typeface="Amiri" pitchFamily="2" charset="-78"/>
+                <a:ea typeface="Amiri" pitchFamily="2" charset="-78"/>
+                <a:cs typeface="Amiri" pitchFamily="2" charset="-78"/>
+              </a:rPr>
               <a:t>ROLE PLAY D (Stretch) — a summer course application.
 SET-UP IN THE BREAKOUT ROOM: A = examiner (reads the left column ONLY — the questions, in order), B = candidate (sees the task column; Core may use the help column), C = observer (ticks the feedback checklist). 1 minute preparation, about 3 minutes speaking, 1 minute feedback, then rotate.
 Task ! is the unexpected question: in the exam the candidate has not seen it — the examiner should read it without warning.
@@ -1243,7 +1251,11 @@
           <a:lstStyle/>
           <a:p>
             <a:r>
-              <a:rPr lang="en-US" dirty="0"/>
+              <a:rPr lang="ar-SA" dirty="0">
+                <a:latin typeface="Amiri" pitchFamily="2" charset="-78"/>
+                <a:ea typeface="Amiri" pitchFamily="2" charset="-78"/>
+                <a:cs typeface="Amiri" pitchFamily="2" charset="-78"/>
+              </a:rPr>
               <a:t>TOPIC CONVERSATION — Core. Examiner asks the questions in order and may add “لِمَاذَا؟ / هَلْ يُمْكِنُ أَنْ تَشْرَحَ أَكْثَرَ؟” to push for more. Candidate aims for one full sentence per question.
 </a:t>
             </a:r>
@@ -1332,7 +1344,11 @@
           <a:lstStyle/>
           <a:p>
             <a:r>
-              <a:rPr lang="en-US" dirty="0"/>
+              <a:rPr lang="ar-SA" dirty="0">
+                <a:latin typeface="Amiri" pitchFamily="2" charset="-78"/>
+                <a:ea typeface="Amiri" pitchFamily="2" charset="-78"/>
+                <a:cs typeface="Amiri" pitchFamily="2" charset="-78"/>
+              </a:rPr>
               <a:t>TOPIC CONVERSATION — Develop. Examiner asks the questions in order and may add “لِمَاذَا؟ / هَلْ يُمْكِنُ أَنْ تَشْرَحَ أَكْثَرَ؟” to push for more. Candidate aims for two or three sentences, with two tenses and a relative clause.
 </a:t>
             </a:r>
@@ -1421,7 +1437,11 @@
           <a:lstStyle/>
           <a:p>
             <a:r>
-              <a:rPr lang="en-US" dirty="0"/>
+              <a:rPr lang="ar-SA" dirty="0">
+                <a:latin typeface="Amiri" pitchFamily="2" charset="-78"/>
+                <a:ea typeface="Amiri" pitchFamily="2" charset="-78"/>
+                <a:cs typeface="Amiri" pitchFamily="2" charset="-78"/>
+              </a:rPr>
               <a:t>TOPIC CONVERSATION — Stretch. Examiner asks the questions in order and may add “لِمَاذَا؟ / هَلْ يُمْكِنُ أَنْ تَشْرَحَ أَكْثَرَ؟” to push for more. Candidate aims for a developed answer: opinion, balance, concession and a conditional.
 </a:t>
             </a:r>
@@ -1510,7 +1530,11 @@
           <a:lstStyle/>
           <a:p>
             <a:r>
-              <a:rPr lang="en-US" dirty="0"/>
+              <a:rPr lang="ar-SA" dirty="0">
+                <a:latin typeface="Amiri" pitchFamily="2" charset="-78"/>
+                <a:ea typeface="Amiri" pitchFamily="2" charset="-78"/>
+                <a:cs typeface="Amiri" pitchFamily="2" charset="-78"/>
+              </a:rPr>
               <a:t>WELCOME (1 min) — while students join.
 • Greet each student by name as they arrive: السَّلَامُ عَلَيْكُمْ. Take the register (Pastoral Tracker: attendance 0/1).
 • 2-MINUTE CHECK-IN (SEND training): a private chat to any student who seemed unsettled last lesson — “Are you okay today? 👍 / 👎”.
@@ -2224,7 +2248,11 @@
           <a:lstStyle/>
           <a:p>
             <a:r>
-              <a:rPr lang="en-US" dirty="0"/>
+              <a:rPr lang="ar-SA" dirty="0">
+                <a:latin typeface="Amiri" pitchFamily="2" charset="-78"/>
+                <a:ea typeface="Amiri" pitchFamily="2" charset="-78"/>
+                <a:cs typeface="Amiri" pitchFamily="2" charset="-78"/>
+              </a:rPr>
               <a:t>TEACH (3 min). Role play = precise and complete; conversation = develop. Choral repetition of the repair phrases. To a girl: تُعِيدِي.</a:t>
             </a:r>
             <a:endParaRPr lang="en-US" dirty="0"/>
@@ -2312,7 +2340,11 @@
           <a:lstStyle/>
           <a:p>
             <a:r>
-              <a:rPr lang="en-US" dirty="0"/>
+              <a:rPr lang="ar-SA" dirty="0">
+                <a:latin typeface="Amiri" pitchFamily="2" charset="-78"/>
+                <a:ea typeface="Amiri" pitchFamily="2" charset="-78"/>
+                <a:cs typeface="Amiri" pitchFamily="2" charset="-78"/>
+              </a:rPr>
               <a:t>LANGUAGE BANK (2 min) — the same verb across three tenses: أَحْجِزُ (now) · حَجَزْتُ (past) · سَأَحْجِزُ (future). أُقِيمُ فِي فُنْدُقٍ · أَقَمْتُ فِي … · سَأُقِيمُ فِي …</a:t>
             </a:r>
             <a:endParaRPr lang="en-US" dirty="0"/>
@@ -2400,7 +2432,11 @@
           <a:lstStyle/>
           <a:p>
             <a:r>
-              <a:rPr lang="en-US" dirty="0"/>
+              <a:rPr lang="ar-SA" dirty="0">
+                <a:latin typeface="Amiri" pitchFamily="2" charset="-78"/>
+                <a:ea typeface="Amiri" pitchFamily="2" charset="-78"/>
+                <a:cs typeface="Amiri" pitchFamily="2" charset="-78"/>
+              </a:rPr>
               <a:t>LANGUAGE BANK (2 min) — instructions on forms are imperatives: امْلَأْ · سَجِّلْ · أَحْضِرْ · اكْتُبْ. Passive: تُرْسَلُ التَّذَاكِرُ بِالبَرِيدِ الإِلِكْتْرُونِيِّ (the tickets are sent by email).</a:t>
             </a:r>
             <a:endParaRPr lang="en-US" dirty="0"/>
@@ -2576,7 +2612,11 @@
           <a:lstStyle/>
           <a:p>
             <a:r>
-              <a:rPr lang="en-US" dirty="0"/>
+              <a:rPr lang="ar-SA" dirty="0">
+                <a:latin typeface="Amiri" pitchFamily="2" charset="-78"/>
+                <a:ea typeface="Amiri" pitchFamily="2" charset="-78"/>
+                <a:cs typeface="Amiri" pitchFamily="2" charset="-78"/>
+              </a:rPr>
               <a:t>ROLE PLAY A (Core) — a hotel reception.
 SET-UP IN THE BREAKOUT ROOM: A = examiner (reads the left column ONLY — the questions, in order), B = candidate (sees the task column; Core may use the help column), C = observer (ticks the feedback checklist). 1 minute preparation, about 3 minutes speaking, 1 minute feedback, then rotate.
 Task ! is the unexpected question: in the exam the candidate has not seen it — the examiner should read it without warning.
@@ -2668,7 +2708,11 @@
           <a:lstStyle/>
           <a:p>
             <a:r>
-              <a:rPr lang="en-US" dirty="0"/>
+              <a:rPr lang="ar-SA" dirty="0">
+                <a:latin typeface="Amiri" pitchFamily="2" charset="-78"/>
+                <a:ea typeface="Amiri" pitchFamily="2" charset="-78"/>
+                <a:cs typeface="Amiri" pitchFamily="2" charset="-78"/>
+              </a:rPr>
               <a:t>ROLE PLAY B (Core+) — a phone booking.
 SET-UP IN THE BREAKOUT ROOM: A = examiner (reads the left column ONLY — the questions, in order), B = candidate (sees the task column; Core may use the help column), C = observer (ticks the feedback checklist). 1 minute preparation, about 3 minutes speaking, 1 minute feedback, then rotate.
 Task ! is the unexpected question: in the exam the candidate has not seen it — the examiner should read it without warning.
@@ -3156,6 +3200,7 @@
                   <a:srgbClr val="D4AF37"/>
                 </a:solidFill>
                 <a:latin typeface="Amiri" pitchFamily="2" charset="-78"/>
+                <a:ea typeface="Amiri" pitchFamily="2" charset="-78"/>
                 <a:cs typeface="Amiri" pitchFamily="2" charset="-78"/>
               </a:rPr>
               <a:t>م</a:t>
@@ -3362,6 +3407,7 @@
                   <a:srgbClr val="D4AF37"/>
                 </a:solidFill>
                 <a:latin typeface="Amiri" pitchFamily="2" charset="-78"/>
+                <a:ea typeface="Amiri" pitchFamily="2" charset="-78"/>
                 <a:cs typeface="Amiri" pitchFamily="2" charset="-78"/>
               </a:rPr>
               <a:t>وَرْشَةُ التَّحَدُّثِ — الوَثَائِقُ وَالمَعْلُومَاتُ</a:t>
@@ -3413,6 +3459,7 @@
                   <a:srgbClr val="C6D2E6"/>
                 </a:solidFill>
                 <a:latin typeface="Amiri" pitchFamily="2" charset="-78"/>
+                <a:ea typeface="Amiri" pitchFamily="2" charset="-78"/>
                 <a:cs typeface="Amiri" pitchFamily="2" charset="-78"/>
               </a:rPr>
               <a:t>أَحْضِرْ</a:t>
@@ -3439,6 +3486,7 @@
                   <a:srgbClr val="C6D2E6"/>
                 </a:solidFill>
                 <a:latin typeface="Amiri" pitchFamily="2" charset="-78"/>
+                <a:ea typeface="Amiri" pitchFamily="2" charset="-78"/>
                 <a:cs typeface="Amiri" pitchFamily="2" charset="-78"/>
               </a:rPr>
               <a:t>سَجِّلْ</a:t>
@@ -3465,6 +3513,7 @@
                   <a:srgbClr val="C6D2E6"/>
                 </a:solidFill>
                 <a:latin typeface="Amiri" pitchFamily="2" charset="-78"/>
+                <a:ea typeface="Amiri" pitchFamily="2" charset="-78"/>
                 <a:cs typeface="Amiri" pitchFamily="2" charset="-78"/>
               </a:rPr>
               <a:t>امْلَأْ</a:t>
@@ -3897,6 +3946,7 @@
                   <a:srgbClr val="D4AF37"/>
                 </a:solidFill>
                 <a:latin typeface="Amiri" pitchFamily="2" charset="-78"/>
+                <a:ea typeface="Amiri" pitchFamily="2" charset="-78"/>
                 <a:cs typeface="Amiri" pitchFamily="2" charset="-78"/>
               </a:rPr>
               <a:t>م</a:t>
@@ -4217,6 +4267,7 @@
                   <a:srgbClr val="8A6D1E"/>
                 </a:solidFill>
                 <a:latin typeface="Amiri" pitchFamily="2" charset="-78"/>
+                <a:ea typeface="Amiri" pitchFamily="2" charset="-78"/>
                 <a:cs typeface="Amiri" pitchFamily="2" charset="-78"/>
               </a:rPr>
               <a:t>مُشْكِلَةٌ فِي الحَجْزِ</a:t>
@@ -4497,6 +4548,7 @@
                   <a:srgbClr val="1B3B6F"/>
                 </a:solidFill>
                 <a:latin typeface="Amiri" pitchFamily="2" charset="-78"/>
+                <a:ea typeface="Amiri" pitchFamily="2" charset="-78"/>
                 <a:cs typeface="Amiri" pitchFamily="2" charset="-78"/>
               </a:rPr>
               <a:t>حَجَزْتُ … لٰكِنَّ …</a:t>
@@ -4573,6 +4625,7 @@
                   <a:srgbClr val="1B3B6F"/>
                 </a:solidFill>
                 <a:latin typeface="Amiri" pitchFamily="2" charset="-78"/>
+                <a:ea typeface="Amiri" pitchFamily="2" charset="-78"/>
                 <a:cs typeface="Amiri" pitchFamily="2" charset="-78"/>
               </a:rPr>
               <a:t>تَفَضَّلْ، مَا المُشْكِلَةُ؟</a:t>
@@ -4676,6 +4729,7 @@
                   <a:srgbClr val="1B3B6F"/>
                 </a:solidFill>
                 <a:latin typeface="Amiri" pitchFamily="2" charset="-78"/>
+                <a:ea typeface="Amiri" pitchFamily="2" charset="-78"/>
                 <a:cs typeface="Amiri" pitchFamily="2" charset="-78"/>
               </a:rPr>
               <a:t>نَعَمْ، أُرْسِلَ إِلَيَّ … قَبْلَ …</a:t>
@@ -4752,6 +4806,7 @@
                   <a:srgbClr val="1B3B6F"/>
                 </a:solidFill>
                 <a:latin typeface="Amiri" pitchFamily="2" charset="-78"/>
+                <a:ea typeface="Amiri" pitchFamily="2" charset="-78"/>
                 <a:cs typeface="Amiri" pitchFamily="2" charset="-78"/>
               </a:rPr>
               <a:t>هَلْ عِنْدَكَ تَأْكِيدُ الحَجْزِ؟</a:t>
@@ -4855,6 +4910,7 @@
                   <a:srgbClr val="1B3B6F"/>
                 </a:solidFill>
                 <a:latin typeface="Amiri" pitchFamily="2" charset="-78"/>
+                <a:ea typeface="Amiri" pitchFamily="2" charset="-78"/>
                 <a:cs typeface="Amiri" pitchFamily="2" charset="-78"/>
               </a:rPr>
               <a:t>إِذَنْ هَلْ يُمْكِنُ أَنْ … ؟</a:t>
@@ -4931,6 +4987,7 @@
                   <a:srgbClr val="1B3B6F"/>
                 </a:solidFill>
                 <a:latin typeface="Amiri" pitchFamily="2" charset="-78"/>
+                <a:ea typeface="Amiri" pitchFamily="2" charset="-78"/>
                 <a:cs typeface="Amiri" pitchFamily="2" charset="-78"/>
               </a:rPr>
               <a:t>أَعْتَذِرُ جِدًّا. الفُنْدُقُ مُمْتَلِئٌ اللَّيْلَةَ.</a:t>
@@ -5034,6 +5091,7 @@
                   <a:srgbClr val="1B3B6F"/>
                 </a:solidFill>
                 <a:latin typeface="Amiri" pitchFamily="2" charset="-78"/>
+                <a:ea typeface="Amiri" pitchFamily="2" charset="-78"/>
                 <a:cs typeface="Amiri" pitchFamily="2" charset="-78"/>
               </a:rPr>
               <a:t>شُكْرًا … وَأَرْجُو أَنْ …</a:t>
@@ -5110,6 +5168,7 @@
                   <a:srgbClr val="1B3B6F"/>
                 </a:solidFill>
                 <a:latin typeface="Amiri" pitchFamily="2" charset="-78"/>
+                <a:ea typeface="Amiri" pitchFamily="2" charset="-78"/>
                 <a:cs typeface="Amiri" pitchFamily="2" charset="-78"/>
               </a:rPr>
               <a:t>طَبْعًا، وَسَنُقَدِّمُ لَكَ عَشَاءً مَجَّانِيًّا.</a:t>
@@ -5213,6 +5272,7 @@
                   <a:srgbClr val="1B3B6F"/>
                 </a:solidFill>
                 <a:latin typeface="Amiri" pitchFamily="2" charset="-78"/>
+                <a:ea typeface="Amiri" pitchFamily="2" charset="-78"/>
                 <a:cs typeface="Amiri" pitchFamily="2" charset="-78"/>
               </a:rPr>
               <a:t>نَعَمْ / رُبَّمَا، سَأَحْجِزُ … إِذَا …</a:t>
@@ -5289,6 +5349,7 @@
                   <a:srgbClr val="1B3B6F"/>
                 </a:solidFill>
                 <a:latin typeface="Amiri" pitchFamily="2" charset="-78"/>
+                <a:ea typeface="Amiri" pitchFamily="2" charset="-78"/>
                 <a:cs typeface="Amiri" pitchFamily="2" charset="-78"/>
               </a:rPr>
               <a:t>هَلْ سَتَحْجِزُ عِنْدَنَا مَرَّةً أُخْرَى؟</a:t>
@@ -5498,6 +5559,7 @@
                   <a:srgbClr val="D4AF37"/>
                 </a:solidFill>
                 <a:latin typeface="Amiri" pitchFamily="2" charset="-78"/>
+                <a:ea typeface="Amiri" pitchFamily="2" charset="-78"/>
                 <a:cs typeface="Amiri" pitchFamily="2" charset="-78"/>
               </a:rPr>
               <a:t>م</a:t>
@@ -5818,6 +5880,7 @@
                   <a:srgbClr val="8A6D1E"/>
                 </a:solidFill>
                 <a:latin typeface="Amiri" pitchFamily="2" charset="-78"/>
+                <a:ea typeface="Amiri" pitchFamily="2" charset="-78"/>
                 <a:cs typeface="Amiri" pitchFamily="2" charset="-78"/>
               </a:rPr>
               <a:t>مُقَابَلَةُ القَبُولِ</a:t>
@@ -6098,6 +6161,7 @@
                   <a:srgbClr val="1B3B6F"/>
                 </a:solidFill>
                 <a:latin typeface="Amiri" pitchFamily="2" charset="-78"/>
+                <a:ea typeface="Amiri" pitchFamily="2" charset="-78"/>
                 <a:cs typeface="Amiri" pitchFamily="2" charset="-78"/>
               </a:rPr>
               <a:t>نَعَمْ، مَلَأْتُهَا … مَا عَدَا …</a:t>
@@ -6174,6 +6238,7 @@
                   <a:srgbClr val="1B3B6F"/>
                 </a:solidFill>
                 <a:latin typeface="Amiri" pitchFamily="2" charset="-78"/>
+                <a:ea typeface="Amiri" pitchFamily="2" charset="-78"/>
                 <a:cs typeface="Amiri" pitchFamily="2" charset="-78"/>
               </a:rPr>
               <a:t>هَلْ مَلَأْتَ الاسْتِمَارَةَ كُلَّهَا؟</a:t>
@@ -6277,6 +6342,7 @@
                   <a:srgbClr val="1B3B6F"/>
                 </a:solidFill>
                 <a:latin typeface="Amiri" pitchFamily="2" charset="-78"/>
+                <a:ea typeface="Amiri" pitchFamily="2" charset="-78"/>
                 <a:cs typeface="Amiri" pitchFamily="2" charset="-78"/>
               </a:rPr>
               <a:t>لِأَنَّهَا الدَّوْرَةُ الوَحِيدَةُ الَّتِي …</a:t>
@@ -6353,6 +6419,7 @@
                   <a:srgbClr val="1B3B6F"/>
                 </a:solidFill>
                 <a:latin typeface="Amiri" pitchFamily="2" charset="-78"/>
+                <a:ea typeface="Amiri" pitchFamily="2" charset="-78"/>
                 <a:cs typeface="Amiri" pitchFamily="2" charset="-78"/>
               </a:rPr>
               <a:t>لِمَاذَا اخْتَرْتَ هٰذِهِ الدَّوْرَةَ بِالذَّاتِ؟</a:t>
@@ -6456,6 +6523,7 @@
                   <a:srgbClr val="1B3B6F"/>
                 </a:solidFill>
                 <a:latin typeface="Amiri" pitchFamily="2" charset="-78"/>
+                <a:ea typeface="Amiri" pitchFamily="2" charset="-78"/>
                 <a:cs typeface="Amiri" pitchFamily="2" charset="-78"/>
               </a:rPr>
               <a:t>نَعَمْ، فِي … حَيْثُ … فَتَعَلَّمْتُ …</a:t>
@@ -6532,6 +6600,7 @@
                   <a:srgbClr val="1B3B6F"/>
                 </a:solidFill>
                 <a:latin typeface="Amiri" pitchFamily="2" charset="-78"/>
+                <a:ea typeface="Amiri" pitchFamily="2" charset="-78"/>
                 <a:cs typeface="Amiri" pitchFamily="2" charset="-78"/>
               </a:rPr>
               <a:t>هَلْ دَرَسْتَ فِي الخَارِجِ مِنْ قَبْلُ؟</a:t>
@@ -6635,6 +6704,7 @@
                   <a:srgbClr val="1B3B6F"/>
                 </a:solidFill>
                 <a:latin typeface="Amiri" pitchFamily="2" charset="-78"/>
+                <a:ea typeface="Amiri" pitchFamily="2" charset="-78"/>
                 <a:cs typeface="Amiri" pitchFamily="2" charset="-78"/>
               </a:rPr>
               <a:t>صَحِيحٌ أَنَّ … غَيْرَ أَنِّي …</a:t>
@@ -6711,6 +6781,7 @@
                   <a:srgbClr val="1B3B6F"/>
                 </a:solidFill>
                 <a:latin typeface="Amiri" pitchFamily="2" charset="-78"/>
+                <a:ea typeface="Amiri" pitchFamily="2" charset="-78"/>
                 <a:cs typeface="Amiri" pitchFamily="2" charset="-78"/>
               </a:rPr>
               <a:t>يُشْتَرَطُ أَنْ يَتَكَلَّمَ الطَّالِبُ العَرَبِيَّةَ فَقَطْ.</a:t>
@@ -6814,6 +6885,7 @@
                   <a:srgbClr val="1B3B6F"/>
                 </a:solidFill>
                 <a:latin typeface="Amiri" pitchFamily="2" charset="-78"/>
+                <a:ea typeface="Amiri" pitchFamily="2" charset="-78"/>
                 <a:cs typeface="Amiri" pitchFamily="2" charset="-78"/>
               </a:rPr>
               <a:t>لَوْ لَمْ أُقْبَلْ، لَدَرَسْتُ …</a:t>
@@ -6890,6 +6962,7 @@
                   <a:srgbClr val="1B3B6F"/>
                 </a:solidFill>
                 <a:latin typeface="Amiri" pitchFamily="2" charset="-78"/>
+                <a:ea typeface="Amiri" pitchFamily="2" charset="-78"/>
                 <a:cs typeface="Amiri" pitchFamily="2" charset="-78"/>
               </a:rPr>
               <a:t>لَوْ لَمْ تُقْبَلْ هٰذِهِ السَّنَةَ، مَاذَا تَفْعَلُ؟</a:t>
@@ -7099,6 +7172,7 @@
                   <a:srgbClr val="D4AF37"/>
                 </a:solidFill>
                 <a:latin typeface="Amiri" pitchFamily="2" charset="-78"/>
+                <a:ea typeface="Amiri" pitchFamily="2" charset="-78"/>
                 <a:cs typeface="Amiri" pitchFamily="2" charset="-78"/>
               </a:rPr>
               <a:t>م</a:t>
@@ -7419,6 +7493,7 @@
                   <a:srgbClr val="8A6D1E"/>
                 </a:solidFill>
                 <a:latin typeface="Amiri" pitchFamily="2" charset="-78"/>
+                <a:ea typeface="Amiri" pitchFamily="2" charset="-78"/>
                 <a:cs typeface="Amiri" pitchFamily="2" charset="-78"/>
               </a:rPr>
               <a:t>وَرَقَةُ المُلَاحِظِ</a:t>
@@ -8889,6 +8964,7 @@
                   <a:srgbClr val="D4AF37"/>
                 </a:solidFill>
                 <a:latin typeface="Amiri" pitchFamily="2" charset="-78"/>
+                <a:ea typeface="Amiri" pitchFamily="2" charset="-78"/>
                 <a:cs typeface="Amiri" pitchFamily="2" charset="-78"/>
               </a:rPr>
               <a:t>م</a:t>
@@ -9209,6 +9285,7 @@
                   <a:srgbClr val="8A6D1E"/>
                 </a:solidFill>
                 <a:latin typeface="Amiri" pitchFamily="2" charset="-78"/>
+                <a:ea typeface="Amiri" pitchFamily="2" charset="-78"/>
                 <a:cs typeface="Amiri" pitchFamily="2" charset="-78"/>
               </a:rPr>
               <a:t>نَمُوذَجُ الإِجَابَةِ</a:t>
@@ -9451,6 +9528,7 @@
                   <a:srgbClr val="1B3B6F"/>
                 </a:solidFill>
                 <a:latin typeface="Amiri" pitchFamily="2" charset="-78"/>
+                <a:ea typeface="Amiri" pitchFamily="2" charset="-78"/>
                 <a:cs typeface="Amiri" pitchFamily="2" charset="-78"/>
               </a:rPr>
               <a:t>عِنْدِي حَجْزٌ بِاسْمِ يُوسُفَ أَحْمَدَ.</a:t>
@@ -9527,6 +9605,7 @@
                   <a:srgbClr val="1B3B6F"/>
                 </a:solidFill>
                 <a:latin typeface="Amiri" pitchFamily="2" charset="-78"/>
+                <a:ea typeface="Amiri" pitchFamily="2" charset="-78"/>
                 <a:cs typeface="Amiri" pitchFamily="2" charset="-78"/>
               </a:rPr>
               <a:t>مَسَاءَ الخَيْرِ! كَيْفَ أُسَاعِدُكَ؟</a:t>
@@ -9630,6 +9709,7 @@
                   <a:srgbClr val="1B3B6F"/>
                 </a:solidFill>
                 <a:latin typeface="Amiri" pitchFamily="2" charset="-78"/>
+                <a:ea typeface="Amiri" pitchFamily="2" charset="-78"/>
                 <a:cs typeface="Amiri" pitchFamily="2" charset="-78"/>
               </a:rPr>
               <a:t>سَأُقِيمُ ثَلَاثَ لَيَالٍ.</a:t>
@@ -9706,6 +9786,7 @@
                   <a:srgbClr val="1B3B6F"/>
                 </a:solidFill>
                 <a:latin typeface="Amiri" pitchFamily="2" charset="-78"/>
+                <a:ea typeface="Amiri" pitchFamily="2" charset="-78"/>
                 <a:cs typeface="Amiri" pitchFamily="2" charset="-78"/>
               </a:rPr>
               <a:t>كَمْ لَيْلَةً سَتُقِيمُ عِنْدَنَا؟</a:t>
@@ -9809,6 +9890,7 @@
                   <a:srgbClr val="1B3B6F"/>
                 </a:solidFill>
                 <a:latin typeface="Amiri" pitchFamily="2" charset="-78"/>
+                <a:ea typeface="Amiri" pitchFamily="2" charset="-78"/>
                 <a:cs typeface="Amiri" pitchFamily="2" charset="-78"/>
               </a:rPr>
               <a:t>تَفَضَّلْ، هٰذَا جَوَازُ سَفَرِي.</a:t>
@@ -9885,6 +9967,7 @@
                   <a:srgbClr val="1B3B6F"/>
                 </a:solidFill>
                 <a:latin typeface="Amiri" pitchFamily="2" charset="-78"/>
+                <a:ea typeface="Amiri" pitchFamily="2" charset="-78"/>
                 <a:cs typeface="Amiri" pitchFamily="2" charset="-78"/>
               </a:rPr>
               <a:t>جَوَازَ السَّفَرِ مِنْ فَضْلِكَ.</a:t>
@@ -9988,6 +10071,7 @@
                   <a:srgbClr val="1B3B6F"/>
                 </a:solidFill>
                 <a:latin typeface="Amiri" pitchFamily="2" charset="-78"/>
+                <a:ea typeface="Amiri" pitchFamily="2" charset="-78"/>
                 <a:cs typeface="Amiri" pitchFamily="2" charset="-78"/>
               </a:rPr>
               <a:t>مَتَى الفُطُورُ مِنْ فَضْلِكَ؟</a:t>
@@ -10064,6 +10148,7 @@
                   <a:srgbClr val="1B3B6F"/>
                 </a:solidFill>
                 <a:latin typeface="Amiri" pitchFamily="2" charset="-78"/>
+                <a:ea typeface="Amiri" pitchFamily="2" charset="-78"/>
                 <a:cs typeface="Amiri" pitchFamily="2" charset="-78"/>
               </a:rPr>
               <a:t>غُرْفَتُكَ فِي الطَّابِقِ الرَّابِعِ.</a:t>
@@ -10167,6 +10252,7 @@
                   <a:srgbClr val="1B3B6F"/>
                 </a:solidFill>
                 <a:latin typeface="Amiri" pitchFamily="2" charset="-78"/>
+                <a:ea typeface="Amiri" pitchFamily="2" charset="-78"/>
                 <a:cs typeface="Amiri" pitchFamily="2" charset="-78"/>
               </a:rPr>
               <a:t>رَقْمُ هَاتِفِي صِفْرٌ سَبْعَةٌ سَبْعَةٌ، ثَلَاثَةٌ أَرْبَعَةٌ خَمْسَةٌ.</a:t>
@@ -10243,6 +10329,7 @@
                   <a:srgbClr val="1B3B6F"/>
                 </a:solidFill>
                 <a:latin typeface="Amiri" pitchFamily="2" charset="-78"/>
+                <a:ea typeface="Amiri" pitchFamily="2" charset="-78"/>
                 <a:cs typeface="Amiri" pitchFamily="2" charset="-78"/>
               </a:rPr>
               <a:t>مَا رَقْمُ هَاتِفِكَ؟</a:t>
@@ -10452,6 +10539,7 @@
                   <a:srgbClr val="D4AF37"/>
                 </a:solidFill>
                 <a:latin typeface="Amiri" pitchFamily="2" charset="-78"/>
+                <a:ea typeface="Amiri" pitchFamily="2" charset="-78"/>
                 <a:cs typeface="Amiri" pitchFamily="2" charset="-78"/>
               </a:rPr>
               <a:t>م</a:t>
@@ -10772,6 +10860,7 @@
                   <a:srgbClr val="8A6D1E"/>
                 </a:solidFill>
                 <a:latin typeface="Amiri" pitchFamily="2" charset="-78"/>
+                <a:ea typeface="Amiri" pitchFamily="2" charset="-78"/>
                 <a:cs typeface="Amiri" pitchFamily="2" charset="-78"/>
               </a:rPr>
               <a:t>نَمُوذَجُ الإِجَابَةِ</a:t>
@@ -11014,6 +11103,7 @@
                   <a:srgbClr val="1B3B6F"/>
                 </a:solidFill>
                 <a:latin typeface="Amiri" pitchFamily="2" charset="-78"/>
+                <a:ea typeface="Amiri" pitchFamily="2" charset="-78"/>
                 <a:cs typeface="Amiri" pitchFamily="2" charset="-78"/>
               </a:rPr>
               <a:t>أُرِيدُ أَنْ أُسَافِرَ إِلَى الإِسْكَنْدَرِيَّةِ يَوْمَ الخَمِيسِ.</a:t>
@@ -11090,6 +11180,7 @@
                   <a:srgbClr val="1B3B6F"/>
                 </a:solidFill>
                 <a:latin typeface="Amiri" pitchFamily="2" charset="-78"/>
+                <a:ea typeface="Amiri" pitchFamily="2" charset="-78"/>
                 <a:cs typeface="Amiri" pitchFamily="2" charset="-78"/>
               </a:rPr>
               <a:t>أَهْلًا، إِلَى أَيْنَ تُرِيدُ أَنْ تُسَافِرَ؟</a:t>
@@ -11193,6 +11284,7 @@
                   <a:srgbClr val="1B3B6F"/>
                 </a:solidFill>
                 <a:latin typeface="Amiri" pitchFamily="2" charset="-78"/>
+                <a:ea typeface="Amiri" pitchFamily="2" charset="-78"/>
                 <a:cs typeface="Amiri" pitchFamily="2" charset="-78"/>
               </a:rPr>
               <a:t>لَا، ذَهَابٌ وَإِيَابٌ، وَأُرِيدُ أَرْبَعَ تَذَاكِرَ لِأُسْرَتِي.</a:t>
@@ -11269,6 +11361,7 @@
                   <a:srgbClr val="1B3B6F"/>
                 </a:solidFill>
                 <a:latin typeface="Amiri" pitchFamily="2" charset="-78"/>
+                <a:ea typeface="Amiri" pitchFamily="2" charset="-78"/>
                 <a:cs typeface="Amiri" pitchFamily="2" charset="-78"/>
               </a:rPr>
               <a:t>ذَهَابٌ فَقَطْ؟</a:t>
@@ -11372,6 +11465,7 @@
                   <a:srgbClr val="1B3B6F"/>
                 </a:solidFill>
                 <a:latin typeface="Amiri" pitchFamily="2" charset="-78"/>
+                <a:ea typeface="Amiri" pitchFamily="2" charset="-78"/>
                 <a:cs typeface="Amiri" pitchFamily="2" charset="-78"/>
               </a:rPr>
               <a:t>مَا الفَرْقُ بَيْنَهُمَا فِي السِّعْرِ وَالمُدَّةِ؟</a:t>
@@ -11448,6 +11542,7 @@
                   <a:srgbClr val="1B3B6F"/>
                 </a:solidFill>
                 <a:latin typeface="Amiri" pitchFamily="2" charset="-78"/>
+                <a:ea typeface="Amiri" pitchFamily="2" charset="-78"/>
                 <a:cs typeface="Amiri" pitchFamily="2" charset="-78"/>
               </a:rPr>
               <a:t>هُنَاكَ قِطَارٌ فِي السَّاعَةِ الثَّامِنَةِ، وَقِطَارٌ فِي الظُّهْرِ.</a:t>
@@ -11551,6 +11646,7 @@
                   <a:srgbClr val="1B3B6F"/>
                 </a:solidFill>
                 <a:latin typeface="Amiri" pitchFamily="2" charset="-78"/>
+                <a:ea typeface="Amiri" pitchFamily="2" charset="-78"/>
                 <a:cs typeface="Amiri" pitchFamily="2" charset="-78"/>
               </a:rPr>
               <a:t>سَأَحْجِزُ قِطَارَ الظُّهْرِ، لِأَنَّهُ أَرْخَصُ، وَلَسْنَا مُسْتَعْجِلِينَ.</a:t>
@@ -11627,6 +11723,7 @@
                   <a:srgbClr val="1B3B6F"/>
                 </a:solidFill>
                 <a:latin typeface="Amiri" pitchFamily="2" charset="-78"/>
+                <a:ea typeface="Amiri" pitchFamily="2" charset="-78"/>
                 <a:cs typeface="Amiri" pitchFamily="2" charset="-78"/>
               </a:rPr>
               <a:t>قِطَارُ الثَّامِنَةِ أَسْرَعُ، لٰكِنَّهُ أَغْلَى.</a:t>
@@ -11730,6 +11827,7 @@
                   <a:srgbClr val="1B3B6F"/>
                 </a:solidFill>
                 <a:latin typeface="Amiri" pitchFamily="2" charset="-78"/>
+                <a:ea typeface="Amiri" pitchFamily="2" charset="-78"/>
                 <a:cs typeface="Amiri" pitchFamily="2" charset="-78"/>
               </a:rPr>
               <a:t>أَرْجُو أَنْ تُرْسَلَ التَّذَاكِرُ إِلَى بَرِيدِي الإِلِكْتْرُونِيِّ.</a:t>
@@ -11806,6 +11904,7 @@
                   <a:srgbClr val="1B3B6F"/>
                 </a:solidFill>
                 <a:latin typeface="Amiri" pitchFamily="2" charset="-78"/>
+                <a:ea typeface="Amiri" pitchFamily="2" charset="-78"/>
                 <a:cs typeface="Amiri" pitchFamily="2" charset="-78"/>
               </a:rPr>
               <a:t>كَيْفَ تُرِيدُ أَنْ تَسْتَلِمَ التَّذَاكِرَ؟</a:t>
@@ -12015,6 +12114,7 @@
                   <a:srgbClr val="D4AF37"/>
                 </a:solidFill>
                 <a:latin typeface="Amiri" pitchFamily="2" charset="-78"/>
+                <a:ea typeface="Amiri" pitchFamily="2" charset="-78"/>
                 <a:cs typeface="Amiri" pitchFamily="2" charset="-78"/>
               </a:rPr>
               <a:t>م</a:t>
@@ -12335,6 +12435,7 @@
                   <a:srgbClr val="8A6D1E"/>
                 </a:solidFill>
                 <a:latin typeface="Amiri" pitchFamily="2" charset="-78"/>
+                <a:ea typeface="Amiri" pitchFamily="2" charset="-78"/>
                 <a:cs typeface="Amiri" pitchFamily="2" charset="-78"/>
               </a:rPr>
               <a:t>نَمُوذَجُ الإِجَابَةِ</a:t>
@@ -12577,6 +12678,7 @@
                   <a:srgbClr val="1B3B6F"/>
                 </a:solidFill>
                 <a:latin typeface="Amiri" pitchFamily="2" charset="-78"/>
+                <a:ea typeface="Amiri" pitchFamily="2" charset="-78"/>
                 <a:cs typeface="Amiri" pitchFamily="2" charset="-78"/>
               </a:rPr>
               <a:t>حَجَزْتُ غُرْفَةً مُطِلَّةً عَلَى البَحْرِ، لٰكِنَّ الغُرْفَةَ الَّتِي أَعْطَيْتُمُونِي إِيَّاهَا تُطِلُّ عَلَى المَوْقِفِ.</a:t>
@@ -12653,6 +12755,7 @@
                   <a:srgbClr val="1B3B6F"/>
                 </a:solidFill>
                 <a:latin typeface="Amiri" pitchFamily="2" charset="-78"/>
+                <a:ea typeface="Amiri" pitchFamily="2" charset="-78"/>
                 <a:cs typeface="Amiri" pitchFamily="2" charset="-78"/>
               </a:rPr>
               <a:t>تَفَضَّلْ، مَا المُشْكِلَةُ؟</a:t>
@@ -12756,6 +12859,7 @@
                   <a:srgbClr val="1B3B6F"/>
                 </a:solidFill>
                 <a:latin typeface="Amiri" pitchFamily="2" charset="-78"/>
+                <a:ea typeface="Amiri" pitchFamily="2" charset="-78"/>
                 <a:cs typeface="Amiri" pitchFamily="2" charset="-78"/>
               </a:rPr>
               <a:t>نَعَمْ، أُرْسِلَ إِلَيَّ التَّأْكِيدُ بِالبَرِيدِ الإِلِكْتْرُونِيِّ قَبْلَ أُسْبُوعَيْنِ، وَهُوَ عَلَى هَاتِفِي.</a:t>
@@ -12832,6 +12936,7 @@
                   <a:srgbClr val="1B3B6F"/>
                 </a:solidFill>
                 <a:latin typeface="Amiri" pitchFamily="2" charset="-78"/>
+                <a:ea typeface="Amiri" pitchFamily="2" charset="-78"/>
                 <a:cs typeface="Amiri" pitchFamily="2" charset="-78"/>
               </a:rPr>
               <a:t>هَلْ عِنْدَكَ تَأْكِيدُ الحَجْزِ؟</a:t>
@@ -12935,6 +13040,7 @@
                   <a:srgbClr val="1B3B6F"/>
                 </a:solidFill>
                 <a:latin typeface="Amiri" pitchFamily="2" charset="-78"/>
+                <a:ea typeface="Amiri" pitchFamily="2" charset="-78"/>
                 <a:cs typeface="Amiri" pitchFamily="2" charset="-78"/>
               </a:rPr>
               <a:t>إِذَنْ هَلْ يُمْكِنُ أَنْ أَنْتَقِلَ إِلَى الغُرْفَةِ الصَّحِيحَةِ غَدًا صَبَاحًا؟</a:t>
@@ -13011,6 +13117,7 @@
                   <a:srgbClr val="1B3B6F"/>
                 </a:solidFill>
                 <a:latin typeface="Amiri" pitchFamily="2" charset="-78"/>
+                <a:ea typeface="Amiri" pitchFamily="2" charset="-78"/>
                 <a:cs typeface="Amiri" pitchFamily="2" charset="-78"/>
               </a:rPr>
               <a:t>أَعْتَذِرُ جِدًّا. الفُنْدُقُ مُمْتَلِئٌ اللَّيْلَةَ.</a:t>
@@ -13114,6 +13221,7 @@
                   <a:srgbClr val="1B3B6F"/>
                 </a:solidFill>
                 <a:latin typeface="Amiri" pitchFamily="2" charset="-78"/>
+                <a:ea typeface="Amiri" pitchFamily="2" charset="-78"/>
                 <a:cs typeface="Amiri" pitchFamily="2" charset="-78"/>
               </a:rPr>
               <a:t>شُكْرًا جَزِيلًا، وَأَرْجُو أَنْ تُنْقَلَ حَقَائِبِي إِلَى الغُرْفَةِ الجَدِيدَةِ.</a:t>
@@ -13190,6 +13298,7 @@
                   <a:srgbClr val="1B3B6F"/>
                 </a:solidFill>
                 <a:latin typeface="Amiri" pitchFamily="2" charset="-78"/>
+                <a:ea typeface="Amiri" pitchFamily="2" charset="-78"/>
                 <a:cs typeface="Amiri" pitchFamily="2" charset="-78"/>
               </a:rPr>
               <a:t>طَبْعًا، وَسَنُقَدِّمُ لَكَ عَشَاءً مَجَّانِيًّا.</a:t>
@@ -13293,6 +13402,7 @@
                   <a:srgbClr val="1B3B6F"/>
                 </a:solidFill>
                 <a:latin typeface="Amiri" pitchFamily="2" charset="-78"/>
+                <a:ea typeface="Amiri" pitchFamily="2" charset="-78"/>
                 <a:cs typeface="Amiri" pitchFamily="2" charset="-78"/>
               </a:rPr>
               <a:t>رُبَّمَا، سَأَحْجِزُ عِنْدَكُمْ مَرَّةً أُخْرَى إِذَا كَانَتِ الخِدْمَةُ مُمْتَازَةً بَقِيَّةَ الأُسْبُوعِ.</a:t>
@@ -13369,6 +13479,7 @@
                   <a:srgbClr val="1B3B6F"/>
                 </a:solidFill>
                 <a:latin typeface="Amiri" pitchFamily="2" charset="-78"/>
+                <a:ea typeface="Amiri" pitchFamily="2" charset="-78"/>
                 <a:cs typeface="Amiri" pitchFamily="2" charset="-78"/>
               </a:rPr>
               <a:t>هَلْ سَتَحْجِزُ عِنْدَنَا مَرَّةً أُخْرَى؟</a:t>
@@ -13578,6 +13689,7 @@
                   <a:srgbClr val="D4AF37"/>
                 </a:solidFill>
                 <a:latin typeface="Amiri" pitchFamily="2" charset="-78"/>
+                <a:ea typeface="Amiri" pitchFamily="2" charset="-78"/>
                 <a:cs typeface="Amiri" pitchFamily="2" charset="-78"/>
               </a:rPr>
               <a:t>م</a:t>
@@ -13898,6 +14010,7 @@
                   <a:srgbClr val="8A6D1E"/>
                 </a:solidFill>
                 <a:latin typeface="Amiri" pitchFamily="2" charset="-78"/>
+                <a:ea typeface="Amiri" pitchFamily="2" charset="-78"/>
                 <a:cs typeface="Amiri" pitchFamily="2" charset="-78"/>
               </a:rPr>
               <a:t>نَمُوذَجُ الإِجَابَةِ</a:t>
@@ -14140,6 +14253,7 @@
                   <a:srgbClr val="1B3B6F"/>
                 </a:solidFill>
                 <a:latin typeface="Amiri" pitchFamily="2" charset="-78"/>
+                <a:ea typeface="Amiri" pitchFamily="2" charset="-78"/>
                 <a:cs typeface="Amiri" pitchFamily="2" charset="-78"/>
               </a:rPr>
               <a:t>نَعَمْ، مَلَأْتُهَا كُلَّهَا مَا عَدَا رَقْمِ جَوَازِ السَّفَرِ، لِأَنَّ جَوَازِي الجَدِيدَ لَمْ يَصِلْ بَعْدُ.</a:t>
@@ -14216,6 +14330,7 @@
                   <a:srgbClr val="1B3B6F"/>
                 </a:solidFill>
                 <a:latin typeface="Amiri" pitchFamily="2" charset="-78"/>
+                <a:ea typeface="Amiri" pitchFamily="2" charset="-78"/>
                 <a:cs typeface="Amiri" pitchFamily="2" charset="-78"/>
               </a:rPr>
               <a:t>هَلْ مَلَأْتَ الاسْتِمَارَةَ كُلَّهَا؟</a:t>
@@ -14319,6 +14434,7 @@
                   <a:srgbClr val="1B3B6F"/>
                 </a:solidFill>
                 <a:latin typeface="Amiri" pitchFamily="2" charset="-78"/>
+                <a:ea typeface="Amiri" pitchFamily="2" charset="-78"/>
                 <a:cs typeface="Amiri" pitchFamily="2" charset="-78"/>
               </a:rPr>
               <a:t>لِأَنَّهَا الدَّوْرَةُ الوَحِيدَةُ الَّتِي تَجْمَعُ بَيْنَ دُرُوسِ اللُّغَةِ وَالإِقَامَةِ مَعَ عَائِلَةٍ عَرَبِيَّةٍ.</a:t>
@@ -14395,6 +14511,7 @@
                   <a:srgbClr val="1B3B6F"/>
                 </a:solidFill>
                 <a:latin typeface="Amiri" pitchFamily="2" charset="-78"/>
+                <a:ea typeface="Amiri" pitchFamily="2" charset="-78"/>
                 <a:cs typeface="Amiri" pitchFamily="2" charset="-78"/>
               </a:rPr>
               <a:t>لِمَاذَا اخْتَرْتَ هٰذِهِ الدَّوْرَةَ بِالذَّاتِ؟</a:t>
@@ -14498,6 +14615,7 @@
                   <a:srgbClr val="1B3B6F"/>
                 </a:solidFill>
                 <a:latin typeface="Amiri" pitchFamily="2" charset="-78"/>
+                <a:ea typeface="Amiri" pitchFamily="2" charset="-78"/>
                 <a:cs typeface="Amiri" pitchFamily="2" charset="-78"/>
               </a:rPr>
               <a:t>نَعَمْ، فِي الصَّيْفِ المَاضِي أَقَمْتُ أُسْبُوعَيْنِ فِي عَمَّانَ، حَيْثُ حَضَرْتُ دَوْرَةً قَصِيرَةً، فَتَعَلَّمْتُ أَنْ أَعْتَمِدَ عَلَى نَفْسِي.</a:t>
@@ -14574,6 +14692,7 @@
                   <a:srgbClr val="1B3B6F"/>
                 </a:solidFill>
                 <a:latin typeface="Amiri" pitchFamily="2" charset="-78"/>
+                <a:ea typeface="Amiri" pitchFamily="2" charset="-78"/>
                 <a:cs typeface="Amiri" pitchFamily="2" charset="-78"/>
               </a:rPr>
               <a:t>هَلْ دَرَسْتَ فِي الخَارِجِ مِنْ قَبْلُ؟</a:t>
@@ -14677,6 +14796,7 @@
                   <a:srgbClr val="1B3B6F"/>
                 </a:solidFill>
                 <a:latin typeface="Amiri" pitchFamily="2" charset="-78"/>
+                <a:ea typeface="Amiri" pitchFamily="2" charset="-78"/>
                 <a:cs typeface="Amiri" pitchFamily="2" charset="-78"/>
               </a:rPr>
               <a:t>صَحِيحٌ أَنَّ ذٰلِكَ سَيَكُونُ صَعْبًا فِي البِدَايَةِ، غَيْرَ أَنِّي أَعْتَقِدُ أَنَّهُ أَسْرَعُ طَرِيقَةٍ لِلتَّحَسُّنِ.</a:t>
@@ -14753,6 +14873,7 @@
                   <a:srgbClr val="1B3B6F"/>
                 </a:solidFill>
                 <a:latin typeface="Amiri" pitchFamily="2" charset="-78"/>
+                <a:ea typeface="Amiri" pitchFamily="2" charset="-78"/>
                 <a:cs typeface="Amiri" pitchFamily="2" charset="-78"/>
               </a:rPr>
               <a:t>يُشْتَرَطُ أَنْ يَتَكَلَّمَ الطَّالِبُ العَرَبِيَّةَ فَقَطْ.</a:t>
@@ -14856,6 +14977,7 @@
                   <a:srgbClr val="1B3B6F"/>
                 </a:solidFill>
                 <a:latin typeface="Amiri" pitchFamily="2" charset="-78"/>
+                <a:ea typeface="Amiri" pitchFamily="2" charset="-78"/>
                 <a:cs typeface="Amiri" pitchFamily="2" charset="-78"/>
               </a:rPr>
               <a:t>لَوْ لَمْ أُقْبَلْ، لَدَرَسْتُ عَلَى الإِنْتَرْنِتِ طُوالَ السَّنَةِ، وَلَقَدَّمْتُ طَلَبًا جَدِيدًا فِي السَّنَةِ القَادِمَةِ.</a:t>
@@ -14932,6 +15054,7 @@
                   <a:srgbClr val="1B3B6F"/>
                 </a:solidFill>
                 <a:latin typeface="Amiri" pitchFamily="2" charset="-78"/>
+                <a:ea typeface="Amiri" pitchFamily="2" charset="-78"/>
                 <a:cs typeface="Amiri" pitchFamily="2" charset="-78"/>
               </a:rPr>
               <a:t>لَوْ لَمْ تُقْبَلْ هٰذِهِ السَّنَةَ، مَاذَا تَفْعَلُ؟</a:t>
@@ -15141,6 +15264,7 @@
                   <a:srgbClr val="D4AF37"/>
                 </a:solidFill>
                 <a:latin typeface="Amiri" pitchFamily="2" charset="-78"/>
+                <a:ea typeface="Amiri" pitchFamily="2" charset="-78"/>
                 <a:cs typeface="Amiri" pitchFamily="2" charset="-78"/>
               </a:rPr>
               <a:t>م</a:t>
@@ -15461,6 +15585,7 @@
                   <a:srgbClr val="8A6D1E"/>
                 </a:solidFill>
                 <a:latin typeface="Amiri" pitchFamily="2" charset="-78"/>
+                <a:ea typeface="Amiri" pitchFamily="2" charset="-78"/>
                 <a:cs typeface="Amiri" pitchFamily="2" charset="-78"/>
               </a:rPr>
               <a:t>الحَجْزُ وَالمَعْلُومَاتُ</a:t>
@@ -15741,6 +15866,7 @@
                   <a:srgbClr val="1B3B6F"/>
                 </a:solidFill>
                 <a:latin typeface="Amiri" pitchFamily="2" charset="-78"/>
+                <a:ea typeface="Amiri" pitchFamily="2" charset="-78"/>
                 <a:cs typeface="Amiri" pitchFamily="2" charset="-78"/>
               </a:rPr>
               <a:t>اسْمِي … وَأَنَا …</a:t>
@@ -15817,6 +15943,7 @@
                   <a:srgbClr val="1B3B6F"/>
                 </a:solidFill>
                 <a:latin typeface="Amiri" pitchFamily="2" charset="-78"/>
+                <a:ea typeface="Amiri" pitchFamily="2" charset="-78"/>
                 <a:cs typeface="Amiri" pitchFamily="2" charset="-78"/>
               </a:rPr>
               <a:t>مَا اسْمُكَ الكَامِلُ؟ وَمَا جِنْسِيَّتُكَ؟</a:t>
@@ -15985,6 +16112,7 @@
                   <a:srgbClr val="1B3B6F"/>
                 </a:solidFill>
                 <a:latin typeface="Amiri" pitchFamily="2" charset="-78"/>
+                <a:ea typeface="Amiri" pitchFamily="2" charset="-78"/>
                 <a:cs typeface="Amiri" pitchFamily="2" charset="-78"/>
               </a:rPr>
               <a:t>وُلِدْتُ فِي …</a:t>
@@ -16061,6 +16189,7 @@
                   <a:srgbClr val="1B3B6F"/>
                 </a:solidFill>
                 <a:latin typeface="Amiri" pitchFamily="2" charset="-78"/>
+                <a:ea typeface="Amiri" pitchFamily="2" charset="-78"/>
                 <a:cs typeface="Amiri" pitchFamily="2" charset="-78"/>
               </a:rPr>
               <a:t>مَتَى وُلِدْتَ؟</a:t>
@@ -16229,6 +16358,7 @@
                   <a:srgbClr val="1B3B6F"/>
                 </a:solidFill>
                 <a:latin typeface="Amiri" pitchFamily="2" charset="-78"/>
+                <a:ea typeface="Amiri" pitchFamily="2" charset="-78"/>
                 <a:cs typeface="Amiri" pitchFamily="2" charset="-78"/>
               </a:rPr>
               <a:t>نَعَمْ، أَحْجِزُ …</a:t>
@@ -16305,6 +16435,7 @@
                   <a:srgbClr val="1B3B6F"/>
                 </a:solidFill>
                 <a:latin typeface="Amiri" pitchFamily="2" charset="-78"/>
+                <a:ea typeface="Amiri" pitchFamily="2" charset="-78"/>
                 <a:cs typeface="Amiri" pitchFamily="2" charset="-78"/>
               </a:rPr>
               <a:t>هَلْ تَحْجِزُ التَّذَاكِرَ عَلَى الإِنْتَرْنِتِ؟</a:t>
@@ -16473,6 +16604,7 @@
                   <a:srgbClr val="1B3B6F"/>
                 </a:solidFill>
                 <a:latin typeface="Amiri" pitchFamily="2" charset="-78"/>
+                <a:ea typeface="Amiri" pitchFamily="2" charset="-78"/>
                 <a:cs typeface="Amiri" pitchFamily="2" charset="-78"/>
               </a:rPr>
               <a:t>أَقَمْتُ فِي …</a:t>
@@ -16549,6 +16681,7 @@
                   <a:srgbClr val="1B3B6F"/>
                 </a:solidFill>
                 <a:latin typeface="Amiri" pitchFamily="2" charset="-78"/>
+                <a:ea typeface="Amiri" pitchFamily="2" charset="-78"/>
                 <a:cs typeface="Amiri" pitchFamily="2" charset="-78"/>
               </a:rPr>
               <a:t>أَيْنَ أَقَمْتَ فِي العُطْلَةِ المَاضِيَةِ؟</a:t>
@@ -16717,6 +16850,7 @@
                   <a:srgbClr val="1B3B6F"/>
                 </a:solidFill>
                 <a:latin typeface="Amiri" pitchFamily="2" charset="-78"/>
+                <a:ea typeface="Amiri" pitchFamily="2" charset="-78"/>
                 <a:cs typeface="Amiri" pitchFamily="2" charset="-78"/>
               </a:rPr>
               <a:t>عُنْوَانِي …</a:t>
@@ -16793,6 +16927,7 @@
                   <a:srgbClr val="1B3B6F"/>
                 </a:solidFill>
                 <a:latin typeface="Amiri" pitchFamily="2" charset="-78"/>
+                <a:ea typeface="Amiri" pitchFamily="2" charset="-78"/>
                 <a:cs typeface="Amiri" pitchFamily="2" charset="-78"/>
               </a:rPr>
               <a:t>مَا عُنْوَانُ بَرِيدِكَ الإِلِكْتْرُونِيِّ؟</a:t>
@@ -16947,6 +17082,7 @@
                   <a:srgbClr val="1B3B6F"/>
                 </a:solidFill>
                 <a:latin typeface="Amiri" pitchFamily="2" charset="-78"/>
+                <a:ea typeface="Amiri" pitchFamily="2" charset="-78"/>
                 <a:cs typeface="Amiri" pitchFamily="2" charset="-78"/>
               </a:rPr>
               <a:t>عَفْوًا، هَلْ يُمْكِنُ أَنْ تُعِيدَ السُّؤَالَ؟</a:t>
@@ -17080,6 +17216,7 @@
                   <a:srgbClr val="D4AF37"/>
                 </a:solidFill>
                 <a:latin typeface="Amiri" pitchFamily="2" charset="-78"/>
+                <a:ea typeface="Amiri" pitchFamily="2" charset="-78"/>
                 <a:cs typeface="Amiri" pitchFamily="2" charset="-78"/>
               </a:rPr>
               <a:t>م</a:t>
@@ -17400,6 +17537,7 @@
                   <a:srgbClr val="8A6D1E"/>
                 </a:solidFill>
                 <a:latin typeface="Amiri" pitchFamily="2" charset="-78"/>
+                <a:ea typeface="Amiri" pitchFamily="2" charset="-78"/>
                 <a:cs typeface="Amiri" pitchFamily="2" charset="-78"/>
               </a:rPr>
               <a:t>الوَثَائِقُ فِي حَيَاتِي</a:t>
@@ -17680,6 +17818,7 @@
                   <a:srgbClr val="1B3B6F"/>
                 </a:solidFill>
                 <a:latin typeface="Amiri" pitchFamily="2" charset="-78"/>
+                <a:ea typeface="Amiri" pitchFamily="2" charset="-78"/>
                 <a:cs typeface="Amiri" pitchFamily="2" charset="-78"/>
               </a:rPr>
               <a:t>آخِرَ مَرَّةٍ حَجَزْتُ …</a:t>
@@ -17756,6 +17895,7 @@
                   <a:srgbClr val="1B3B6F"/>
                 </a:solidFill>
                 <a:latin typeface="Amiri" pitchFamily="2" charset="-78"/>
+                <a:ea typeface="Amiri" pitchFamily="2" charset="-78"/>
                 <a:cs typeface="Amiri" pitchFamily="2" charset="-78"/>
               </a:rPr>
               <a:t>صِفْ آخِرَ مَرَّةٍ حَجَزْتَ فِيهَا شَيْئًا.</a:t>
@@ -17859,6 +17999,7 @@
                   <a:srgbClr val="1B3B6F"/>
                 </a:solidFill>
                 <a:latin typeface="Amiri" pitchFamily="2" charset="-78"/>
+                <a:ea typeface="Amiri" pitchFamily="2" charset="-78"/>
                 <a:cs typeface="Amiri" pitchFamily="2" charset="-78"/>
               </a:rPr>
               <a:t>أُفَضِّلُ … لِأَنَّ …</a:t>
@@ -17935,6 +18076,7 @@
                   <a:srgbClr val="1B3B6F"/>
                 </a:solidFill>
                 <a:latin typeface="Amiri" pitchFamily="2" charset="-78"/>
+                <a:ea typeface="Amiri" pitchFamily="2" charset="-78"/>
                 <a:cs typeface="Amiri" pitchFamily="2" charset="-78"/>
               </a:rPr>
               <a:t>هَلْ تُفَضِّلُ الحَجْزَ عَلَى الإِنْتَرْنِتِ أَمْ فِي المَكْتَبِ؟</a:t>
@@ -18038,6 +18180,7 @@
                   <a:srgbClr val="1B3B6F"/>
                 </a:solidFill>
                 <a:latin typeface="Amiri" pitchFamily="2" charset="-78"/>
+                <a:ea typeface="Amiri" pitchFamily="2" charset="-78"/>
                 <a:cs typeface="Amiri" pitchFamily="2" charset="-78"/>
               </a:rPr>
               <a:t>أَحْتَاجُ إِلَى … وَ…</a:t>
@@ -18114,6 +18257,7 @@
                   <a:srgbClr val="1B3B6F"/>
                 </a:solidFill>
                 <a:latin typeface="Amiri" pitchFamily="2" charset="-78"/>
+                <a:ea typeface="Amiri" pitchFamily="2" charset="-78"/>
                 <a:cs typeface="Amiri" pitchFamily="2" charset="-78"/>
               </a:rPr>
               <a:t>مَا الوَثَائِقُ الَّتِي تَحْتَاجُ إِلَيْهَا لِلسَّفَرِ؟</a:t>
@@ -18217,6 +18361,7 @@
                   <a:srgbClr val="1B3B6F"/>
                 </a:solidFill>
                 <a:latin typeface="Amiri" pitchFamily="2" charset="-78"/>
+                <a:ea typeface="Amiri" pitchFamily="2" charset="-78"/>
                 <a:cs typeface="Amiri" pitchFamily="2" charset="-78"/>
               </a:rPr>
               <a:t>نَعَمْ، مَلَأْتُ اسْتِمَارَةً لِلتَّسْجِيلِ فِي …</a:t>
@@ -18293,6 +18438,7 @@
                   <a:srgbClr val="1B3B6F"/>
                 </a:solidFill>
                 <a:latin typeface="Amiri" pitchFamily="2" charset="-78"/>
+                <a:ea typeface="Amiri" pitchFamily="2" charset="-78"/>
                 <a:cs typeface="Amiri" pitchFamily="2" charset="-78"/>
               </a:rPr>
               <a:t>هَلْ مَلَأْتَ اسْتِمَارَةً مُهِمَّةً مِنْ قَبْلُ؟</a:t>
@@ -18396,6 +18542,7 @@
                   <a:srgbClr val="1B3B6F"/>
                 </a:solidFill>
                 <a:latin typeface="Amiri" pitchFamily="2" charset="-78"/>
+                <a:ea typeface="Amiri" pitchFamily="2" charset="-78"/>
                 <a:cs typeface="Amiri" pitchFamily="2" charset="-78"/>
               </a:rPr>
               <a:t>سَأُقِيمُ فِي … الَّذِي / الَّتِي …</a:t>
@@ -18472,6 +18619,7 @@
                   <a:srgbClr val="1B3B6F"/>
                 </a:solidFill>
                 <a:latin typeface="Amiri" pitchFamily="2" charset="-78"/>
+                <a:ea typeface="Amiri" pitchFamily="2" charset="-78"/>
                 <a:cs typeface="Amiri" pitchFamily="2" charset="-78"/>
               </a:rPr>
               <a:t>أَيْنَ سَتُقِيمُ فِي العُطْلَةِ القَادِمَةِ؟</a:t>
@@ -18681,6 +18829,7 @@
                   <a:srgbClr val="D4AF37"/>
                 </a:solidFill>
                 <a:latin typeface="Amiri" pitchFamily="2" charset="-78"/>
+                <a:ea typeface="Amiri" pitchFamily="2" charset="-78"/>
                 <a:cs typeface="Amiri" pitchFamily="2" charset="-78"/>
               </a:rPr>
               <a:t>م</a:t>
@@ -19001,6 +19150,7 @@
                   <a:srgbClr val="8A6D1E"/>
                 </a:solidFill>
                 <a:latin typeface="Amiri" pitchFamily="2" charset="-78"/>
+                <a:ea typeface="Amiri" pitchFamily="2" charset="-78"/>
                 <a:cs typeface="Amiri" pitchFamily="2" charset="-78"/>
               </a:rPr>
               <a:t>المَعْلُومَاتُ الرَّقْمِيَّةُ</a:t>
@@ -19281,6 +19431,7 @@
                   <a:srgbClr val="1B3B6F"/>
                 </a:solidFill>
                 <a:latin typeface="Amiri" pitchFamily="2" charset="-78"/>
+                <a:ea typeface="Amiri" pitchFamily="2" charset="-78"/>
                 <a:cs typeface="Amiri" pitchFamily="2" charset="-78"/>
               </a:rPr>
               <a:t>يَعْتَمِدُ ذٰلِكَ عَلَى … فَإِذَا …</a:t>
@@ -19357,6 +19508,7 @@
                   <a:srgbClr val="1B3B6F"/>
                 </a:solidFill>
                 <a:latin typeface="Amiri" pitchFamily="2" charset="-78"/>
+                <a:ea typeface="Amiri" pitchFamily="2" charset="-78"/>
                 <a:cs typeface="Amiri" pitchFamily="2" charset="-78"/>
               </a:rPr>
               <a:t>هَلْ مِنَ الآمِنِ أَنْ نُعْطِيَ مَعْلُومَاتِنَا الشَّخْصِيَّةَ عَلَى الإِنْتَرْنِتِ؟</a:t>
@@ -19460,6 +19612,7 @@
                   <a:srgbClr val="1B3B6F"/>
                 </a:solidFill>
                 <a:latin typeface="Amiri" pitchFamily="2" charset="-78"/>
+                <a:ea typeface="Amiri" pitchFamily="2" charset="-78"/>
                 <a:cs typeface="Amiri" pitchFamily="2" charset="-78"/>
               </a:rPr>
               <a:t>أَعْتَقِدُ أَنَّ … لٰكِنَّ …</a:t>
@@ -19536,6 +19689,7 @@
                   <a:srgbClr val="1B3B6F"/>
                 </a:solidFill>
                 <a:latin typeface="Amiri" pitchFamily="2" charset="-78"/>
+                <a:ea typeface="Amiri" pitchFamily="2" charset="-78"/>
                 <a:cs typeface="Amiri" pitchFamily="2" charset="-78"/>
               </a:rPr>
               <a:t>هَلْ سَتَخْتَفِي الوَثَائِقُ الوَرَقِيَّةُ؟</a:t>
@@ -19639,6 +19793,7 @@
                   <a:srgbClr val="1B3B6F"/>
                 </a:solidFill>
                 <a:latin typeface="Amiri" pitchFamily="2" charset="-78"/>
+                <a:ea typeface="Amiri" pitchFamily="2" charset="-78"/>
                 <a:cs typeface="Amiri" pitchFamily="2" charset="-78"/>
               </a:rPr>
               <a:t>مِنْ نَاحِيَةٍ … وَمِنْ نَاحِيَةٍ أُخْرَى …</a:t>
@@ -19715,6 +19870,7 @@
                   <a:srgbClr val="1B3B6F"/>
                 </a:solidFill>
                 <a:latin typeface="Amiri" pitchFamily="2" charset="-78"/>
+                <a:ea typeface="Amiri" pitchFamily="2" charset="-78"/>
                 <a:cs typeface="Amiri" pitchFamily="2" charset="-78"/>
               </a:rPr>
               <a:t>مَا مَزَايَا التَّذَاكِرِ الإِلِكْتْرُونِيَّةِ وَعُيُوبُهَا؟</a:t>
@@ -19818,6 +19974,7 @@
                   <a:srgbClr val="1B3B6F"/>
                 </a:solidFill>
                 <a:latin typeface="Amiri" pitchFamily="2" charset="-78"/>
+                <a:ea typeface="Amiri" pitchFamily="2" charset="-78"/>
                 <a:cs typeface="Amiri" pitchFamily="2" charset="-78"/>
               </a:rPr>
               <a:t>نَعَمْ، مَرَّةً أُلْغِيَتْ … فَقَضَيْنَا …</a:t>
@@ -19894,6 +20051,7 @@
                   <a:srgbClr val="1B3B6F"/>
                 </a:solidFill>
                 <a:latin typeface="Amiri" pitchFamily="2" charset="-78"/>
+                <a:ea typeface="Amiri" pitchFamily="2" charset="-78"/>
                 <a:cs typeface="Amiri" pitchFamily="2" charset="-78"/>
               </a:rPr>
               <a:t>هَلْ حَدَثَتْ لَكَ مُشْكِلَةٌ فِي حَجْزٍ؟</a:t>
@@ -19997,6 +20155,7 @@
                   <a:srgbClr val="1B3B6F"/>
                 </a:solidFill>
                 <a:latin typeface="Amiri" pitchFamily="2" charset="-78"/>
+                <a:ea typeface="Amiri" pitchFamily="2" charset="-78"/>
                 <a:cs typeface="Amiri" pitchFamily="2" charset="-78"/>
               </a:rPr>
               <a:t>لَوْ سُرِقَتْ …، لَغَيَّرْتُ …</a:t>
@@ -20073,6 +20232,7 @@
                   <a:srgbClr val="1B3B6F"/>
                 </a:solidFill>
                 <a:latin typeface="Amiri" pitchFamily="2" charset="-78"/>
+                <a:ea typeface="Amiri" pitchFamily="2" charset="-78"/>
                 <a:cs typeface="Amiri" pitchFamily="2" charset="-78"/>
               </a:rPr>
               <a:t>لَوْ سُرِقَتْ بَيَانَاتُكَ، مَاذَا تَفْعَلُ؟</a:t>
@@ -20282,6 +20442,7 @@
                   <a:srgbClr val="D4AF37"/>
                 </a:solidFill>
                 <a:latin typeface="Amiri" pitchFamily="2" charset="-78"/>
+                <a:ea typeface="Amiri" pitchFamily="2" charset="-78"/>
                 <a:cs typeface="Amiri" pitchFamily="2" charset="-78"/>
               </a:rPr>
               <a:t>م</a:t>
@@ -20602,6 +20763,7 @@
                   <a:srgbClr val="8A6D1E"/>
                 </a:solidFill>
                 <a:latin typeface="Amiri" pitchFamily="2" charset="-78"/>
+                <a:ea typeface="Amiri" pitchFamily="2" charset="-78"/>
                 <a:cs typeface="Amiri" pitchFamily="2" charset="-78"/>
               </a:rPr>
               <a:t>آدَابُ الصَّفِّ</a:t>
@@ -22133,6 +22295,7 @@
                   <a:srgbClr val="D4AF37"/>
                 </a:solidFill>
                 <a:latin typeface="Amiri" pitchFamily="2" charset="-78"/>
+                <a:ea typeface="Amiri" pitchFamily="2" charset="-78"/>
                 <a:cs typeface="Amiri" pitchFamily="2" charset="-78"/>
               </a:rPr>
               <a:t>م</a:t>
@@ -22453,6 +22616,7 @@
                   <a:srgbClr val="8A6D1E"/>
                 </a:solidFill>
                 <a:latin typeface="Amiri" pitchFamily="2" charset="-78"/>
+                <a:ea typeface="Amiri" pitchFamily="2" charset="-78"/>
                 <a:cs typeface="Amiri" pitchFamily="2" charset="-78"/>
               </a:rPr>
               <a:t>نَمُوذَجُ الإِجَابَةِ</a:t>
@@ -22695,6 +22859,7 @@
                   <a:srgbClr val="1B3B6F"/>
                 </a:solidFill>
                 <a:latin typeface="Amiri" pitchFamily="2" charset="-78"/>
+                <a:ea typeface="Amiri" pitchFamily="2" charset="-78"/>
                 <a:cs typeface="Amiri" pitchFamily="2" charset="-78"/>
               </a:rPr>
               <a:t>اسْمِي سَارَةُ عَلِيٌّ، وَأَنَا بَرِيطَانِيَّةٌ.</a:t>
@@ -22771,6 +22936,7 @@
                   <a:srgbClr val="1B3B6F"/>
                 </a:solidFill>
                 <a:latin typeface="Amiri" pitchFamily="2" charset="-78"/>
+                <a:ea typeface="Amiri" pitchFamily="2" charset="-78"/>
                 <a:cs typeface="Amiri" pitchFamily="2" charset="-78"/>
               </a:rPr>
               <a:t>مَا اسْمُكَ الكَامِلُ؟ وَمَا جِنْسِيَّتُكَ؟</a:t>
@@ -22874,6 +23040,7 @@
                   <a:srgbClr val="1B3B6F"/>
                 </a:solidFill>
                 <a:latin typeface="Amiri" pitchFamily="2" charset="-78"/>
+                <a:ea typeface="Amiri" pitchFamily="2" charset="-78"/>
                 <a:cs typeface="Amiri" pitchFamily="2" charset="-78"/>
               </a:rPr>
               <a:t>وُلِدْتُ فِي العَاشِرِ مِنْ مَايُو سَنَةَ أَلْفَيْنِ وَعَشْرَةٍ.</a:t>
@@ -22950,6 +23117,7 @@
                   <a:srgbClr val="1B3B6F"/>
                 </a:solidFill>
                 <a:latin typeface="Amiri" pitchFamily="2" charset="-78"/>
+                <a:ea typeface="Amiri" pitchFamily="2" charset="-78"/>
                 <a:cs typeface="Amiri" pitchFamily="2" charset="-78"/>
               </a:rPr>
               <a:t>مَتَى وُلِدْتَ؟</a:t>
@@ -23053,6 +23221,7 @@
                   <a:srgbClr val="1B3B6F"/>
                 </a:solidFill>
                 <a:latin typeface="Amiri" pitchFamily="2" charset="-78"/>
+                <a:ea typeface="Amiri" pitchFamily="2" charset="-78"/>
                 <a:cs typeface="Amiri" pitchFamily="2" charset="-78"/>
               </a:rPr>
               <a:t>نَعَمْ، أَحْجِزُ تَذَاكِرَ السِّينَمَا عَلَى الإِنْتَرْنِتِ.</a:t>
@@ -23129,6 +23298,7 @@
                   <a:srgbClr val="1B3B6F"/>
                 </a:solidFill>
                 <a:latin typeface="Amiri" pitchFamily="2" charset="-78"/>
+                <a:ea typeface="Amiri" pitchFamily="2" charset="-78"/>
                 <a:cs typeface="Amiri" pitchFamily="2" charset="-78"/>
               </a:rPr>
               <a:t>هَلْ تَحْجِزُ التَّذَاكِرَ عَلَى الإِنْتَرْنِتِ؟</a:t>
@@ -23232,6 +23402,7 @@
                   <a:srgbClr val="1B3B6F"/>
                 </a:solidFill>
                 <a:latin typeface="Amiri" pitchFamily="2" charset="-78"/>
+                <a:ea typeface="Amiri" pitchFamily="2" charset="-78"/>
                 <a:cs typeface="Amiri" pitchFamily="2" charset="-78"/>
               </a:rPr>
               <a:t>أَقَمْتُ فِي فُنْدُقٍ صَغِيرٍ قُرْبَ البَحْرِ.</a:t>
@@ -23308,6 +23479,7 @@
                   <a:srgbClr val="1B3B6F"/>
                 </a:solidFill>
                 <a:latin typeface="Amiri" pitchFamily="2" charset="-78"/>
+                <a:ea typeface="Amiri" pitchFamily="2" charset="-78"/>
                 <a:cs typeface="Amiri" pitchFamily="2" charset="-78"/>
               </a:rPr>
               <a:t>أَيْنَ أَقَمْتَ فِي العُطْلَةِ المَاضِيَةِ؟</a:t>
@@ -23411,6 +23583,7 @@
                   <a:srgbClr val="1B3B6F"/>
                 </a:solidFill>
                 <a:latin typeface="Amiri" pitchFamily="2" charset="-78"/>
+                <a:ea typeface="Amiri" pitchFamily="2" charset="-78"/>
                 <a:cs typeface="Amiri" pitchFamily="2" charset="-78"/>
               </a:rPr>
               <a:t>عُنْوَانِي: سَارَة، نُقْطَة، عَلِي، فِي جِيمِيل.</a:t>
@@ -23487,6 +23660,7 @@
                   <a:srgbClr val="1B3B6F"/>
                 </a:solidFill>
                 <a:latin typeface="Amiri" pitchFamily="2" charset="-78"/>
+                <a:ea typeface="Amiri" pitchFamily="2" charset="-78"/>
                 <a:cs typeface="Amiri" pitchFamily="2" charset="-78"/>
               </a:rPr>
               <a:t>مَا عُنْوَانُ بَرِيدِكَ الإِلِكْتْرُونِيِّ؟</a:t>
@@ -23696,6 +23870,7 @@
                   <a:srgbClr val="D4AF37"/>
                 </a:solidFill>
                 <a:latin typeface="Amiri" pitchFamily="2" charset="-78"/>
+                <a:ea typeface="Amiri" pitchFamily="2" charset="-78"/>
                 <a:cs typeface="Amiri" pitchFamily="2" charset="-78"/>
               </a:rPr>
               <a:t>م</a:t>
@@ -24016,6 +24191,7 @@
                   <a:srgbClr val="8A6D1E"/>
                 </a:solidFill>
                 <a:latin typeface="Amiri" pitchFamily="2" charset="-78"/>
+                <a:ea typeface="Amiri" pitchFamily="2" charset="-78"/>
                 <a:cs typeface="Amiri" pitchFamily="2" charset="-78"/>
               </a:rPr>
               <a:t>نَمُوذَجُ الإِجَابَةِ</a:t>
@@ -24258,6 +24434,7 @@
                   <a:srgbClr val="1B3B6F"/>
                 </a:solidFill>
                 <a:latin typeface="Amiri" pitchFamily="2" charset="-78"/>
+                <a:ea typeface="Amiri" pitchFamily="2" charset="-78"/>
                 <a:cs typeface="Amiri" pitchFamily="2" charset="-78"/>
               </a:rPr>
               <a:t>آخِرَ مَرَّةٍ حَجَزْتُ تَذَاكِرَ لِمُبَارَاةِ كُرَةِ القَدَمِ عَلَى تَطْبِيقِ النَّادِي، وَأُرْسِلَتِ التَّذَاكِرُ إِلَى هَاتِفِي فَوْرًا.</a:t>
@@ -24334,6 +24511,7 @@
                   <a:srgbClr val="1B3B6F"/>
                 </a:solidFill>
                 <a:latin typeface="Amiri" pitchFamily="2" charset="-78"/>
+                <a:ea typeface="Amiri" pitchFamily="2" charset="-78"/>
                 <a:cs typeface="Amiri" pitchFamily="2" charset="-78"/>
               </a:rPr>
               <a:t>صِفْ آخِرَ مَرَّةٍ حَجَزْتَ فِيهَا شَيْئًا.</a:t>
@@ -24437,6 +24615,7 @@
                   <a:srgbClr val="1B3B6F"/>
                 </a:solidFill>
                 <a:latin typeface="Amiri" pitchFamily="2" charset="-78"/>
+                <a:ea typeface="Amiri" pitchFamily="2" charset="-78"/>
                 <a:cs typeface="Amiri" pitchFamily="2" charset="-78"/>
               </a:rPr>
               <a:t>أُفَضِّلُ الحَجْزَ عَلَى الإِنْتَرْنِتِ، لِأَنَّهُ أَسْرَعُ، وَأَسْتَطِيعُ أَنْ أُقَارِنَ الأَسْعَارَ.</a:t>
@@ -24513,6 +24692,7 @@
                   <a:srgbClr val="1B3B6F"/>
                 </a:solidFill>
                 <a:latin typeface="Amiri" pitchFamily="2" charset="-78"/>
+                <a:ea typeface="Amiri" pitchFamily="2" charset="-78"/>
                 <a:cs typeface="Amiri" pitchFamily="2" charset="-78"/>
               </a:rPr>
               <a:t>هَلْ تُفَضِّلُ الحَجْزَ عَلَى الإِنْتَرْنِتِ أَمْ فِي المَكْتَبِ؟</a:t>
@@ -24616,6 +24796,7 @@
                   <a:srgbClr val="1B3B6F"/>
                 </a:solidFill>
                 <a:latin typeface="Amiri" pitchFamily="2" charset="-78"/>
+                <a:ea typeface="Amiri" pitchFamily="2" charset="-78"/>
                 <a:cs typeface="Amiri" pitchFamily="2" charset="-78"/>
               </a:rPr>
               <a:t>أَحْتَاجُ إِلَى جَوَازِ السَّفَرِ، وَتَذْكِرَةِ الطَّائِرَةِ، وَأَحْيَانًا إِلَى تَأْشِيرَةٍ.</a:t>
@@ -24692,6 +24873,7 @@
                   <a:srgbClr val="1B3B6F"/>
                 </a:solidFill>
                 <a:latin typeface="Amiri" pitchFamily="2" charset="-78"/>
+                <a:ea typeface="Amiri" pitchFamily="2" charset="-78"/>
                 <a:cs typeface="Amiri" pitchFamily="2" charset="-78"/>
               </a:rPr>
               <a:t>مَا الوَثَائِقُ الَّتِي تَحْتَاجُ إِلَيْهَا لِلسَّفَرِ؟</a:t>
@@ -24795,6 +24977,7 @@
                   <a:srgbClr val="1B3B6F"/>
                 </a:solidFill>
                 <a:latin typeface="Amiri" pitchFamily="2" charset="-78"/>
+                <a:ea typeface="Amiri" pitchFamily="2" charset="-78"/>
                 <a:cs typeface="Amiri" pitchFamily="2" charset="-78"/>
               </a:rPr>
               <a:t>نَعَمْ، مَلَأْتُ اسْتِمَارَةً لِلتَّسْجِيلِ فِي نَادِي السِّبَاحَةِ، وَكَتَبْتُ فِيهَا مَعْلُومَاتٍ عَنْ صِحَّتِي.</a:t>
@@ -24871,6 +25054,7 @@
                   <a:srgbClr val="1B3B6F"/>
                 </a:solidFill>
                 <a:latin typeface="Amiri" pitchFamily="2" charset="-78"/>
+                <a:ea typeface="Amiri" pitchFamily="2" charset="-78"/>
                 <a:cs typeface="Amiri" pitchFamily="2" charset="-78"/>
               </a:rPr>
               <a:t>هَلْ مَلَأْتَ اسْتِمَارَةً مُهِمَّةً مِنْ قَبْلُ؟</a:t>
@@ -24974,6 +25158,7 @@
                   <a:srgbClr val="1B3B6F"/>
                 </a:solidFill>
                 <a:latin typeface="Amiri" pitchFamily="2" charset="-78"/>
+                <a:ea typeface="Amiri" pitchFamily="2" charset="-78"/>
                 <a:cs typeface="Amiri" pitchFamily="2" charset="-78"/>
               </a:rPr>
               <a:t>سَأُقِيمُ فِي شَقَّةٍ صَغِيرَةٍ حَجَزَهَا أَبِي فِي إِسْطَنْبُولَ، وَهِيَ قَرِيبَةٌ مِنَ المَسْجِدِ الأَزْرَقِ.</a:t>
@@ -25050,6 +25235,7 @@
                   <a:srgbClr val="1B3B6F"/>
                 </a:solidFill>
                 <a:latin typeface="Amiri" pitchFamily="2" charset="-78"/>
+                <a:ea typeface="Amiri" pitchFamily="2" charset="-78"/>
                 <a:cs typeface="Amiri" pitchFamily="2" charset="-78"/>
               </a:rPr>
               <a:t>أَيْنَ سَتُقِيمُ فِي العُطْلَةِ القَادِمَةِ؟</a:t>
@@ -25259,6 +25445,7 @@
                   <a:srgbClr val="D4AF37"/>
                 </a:solidFill>
                 <a:latin typeface="Amiri" pitchFamily="2" charset="-78"/>
+                <a:ea typeface="Amiri" pitchFamily="2" charset="-78"/>
                 <a:cs typeface="Amiri" pitchFamily="2" charset="-78"/>
               </a:rPr>
               <a:t>م</a:t>
@@ -25579,6 +25766,7 @@
                   <a:srgbClr val="8A6D1E"/>
                 </a:solidFill>
                 <a:latin typeface="Amiri" pitchFamily="2" charset="-78"/>
+                <a:ea typeface="Amiri" pitchFamily="2" charset="-78"/>
                 <a:cs typeface="Amiri" pitchFamily="2" charset="-78"/>
               </a:rPr>
               <a:t>نَمُوذَجُ الإِجَابَةِ</a:t>
@@ -25821,6 +26009,7 @@
                   <a:srgbClr val="1B3B6F"/>
                 </a:solidFill>
                 <a:latin typeface="Amiri" pitchFamily="2" charset="-78"/>
+                <a:ea typeface="Amiri" pitchFamily="2" charset="-78"/>
                 <a:cs typeface="Amiri" pitchFamily="2" charset="-78"/>
               </a:rPr>
               <a:t>يَعْتَمِدُ ذٰلِكَ عَلَى المَوْقِعِ؛ فَإِذَا كَانَ رَسْمِيًّا وَمَوْثُوقًا، فَلَا بَأْسَ، أَمَّا المَوَاقِعُ المَجْهُولَةُ فَقَدْ تَسْرِقُ بَيَانَاتِنَا.</a:t>
@@ -25900,6 +26089,7 @@
                   <a:srgbClr val="1B3B6F"/>
                 </a:solidFill>
                 <a:latin typeface="Amiri" pitchFamily="2" charset="-78"/>
+                <a:ea typeface="Amiri" pitchFamily="2" charset="-78"/>
                 <a:cs typeface="Amiri" pitchFamily="2" charset="-78"/>
               </a:rPr>
               <a:t>هَلْ مِنَ الآمِنِ أَنْ نُعْطِيَ مَعْلُومَاتِنَا الشَّخْصِيَّةَ عَلَى الإِنْتَرْنِتِ؟</a:t>
@@ -26003,6 +26193,7 @@
                   <a:srgbClr val="1B3B6F"/>
                 </a:solidFill>
                 <a:latin typeface="Amiri" pitchFamily="2" charset="-78"/>
+                <a:ea typeface="Amiri" pitchFamily="2" charset="-78"/>
                 <a:cs typeface="Amiri" pitchFamily="2" charset="-78"/>
               </a:rPr>
               <a:t>أَعْتَقِدُ أَنَّ مُعْظَمَهَا سَيُصْبِحُ رَقْمِيًّا، لٰكِنَّ بَعْضَ النَّاسِ، كَكِبَارِ السِّنِّ، سَيَظَلُّونَ يُفَضِّلُونَ الوَرَقَ.</a:t>
@@ -26079,6 +26270,7 @@
                   <a:srgbClr val="1B3B6F"/>
                 </a:solidFill>
                 <a:latin typeface="Amiri" pitchFamily="2" charset="-78"/>
+                <a:ea typeface="Amiri" pitchFamily="2" charset="-78"/>
                 <a:cs typeface="Amiri" pitchFamily="2" charset="-78"/>
               </a:rPr>
               <a:t>هَلْ سَتَخْتَفِي الوَثَائِقُ الوَرَقِيَّةُ؟</a:t>
@@ -26182,6 +26374,7 @@
                   <a:srgbClr val="1B3B6F"/>
                 </a:solidFill>
                 <a:latin typeface="Amiri" pitchFamily="2" charset="-78"/>
+                <a:ea typeface="Amiri" pitchFamily="2" charset="-78"/>
                 <a:cs typeface="Amiri" pitchFamily="2" charset="-78"/>
               </a:rPr>
               <a:t>مِنْ نَاحِيَةٍ، لَا تَضِيعُ وَتُوَفِّرُ الوَرَقَ، وَمِنْ نَاحِيَةٍ أُخْرَى، إِذَا نَفِدَتْ بَطَّارِيَّةُ الهَاتِفِ، فَلَنْ تَسْتَطِيعَ الدُّخُولَ!</a:t>
@@ -26258,6 +26451,7 @@
                   <a:srgbClr val="1B3B6F"/>
                 </a:solidFill>
                 <a:latin typeface="Amiri" pitchFamily="2" charset="-78"/>
+                <a:ea typeface="Amiri" pitchFamily="2" charset="-78"/>
                 <a:cs typeface="Amiri" pitchFamily="2" charset="-78"/>
               </a:rPr>
               <a:t>مَا مَزَايَا التَّذَاكِرِ الإِلِكْتْرُونِيَّةِ وَعُيُوبُهَا؟</a:t>
@@ -26467,6 +26661,7 @@
                   <a:srgbClr val="D4AF37"/>
                 </a:solidFill>
                 <a:latin typeface="Amiri" pitchFamily="2" charset="-78"/>
+                <a:ea typeface="Amiri" pitchFamily="2" charset="-78"/>
                 <a:cs typeface="Amiri" pitchFamily="2" charset="-78"/>
               </a:rPr>
               <a:t>م</a:t>
@@ -26787,6 +26982,7 @@
                   <a:srgbClr val="8A6D1E"/>
                 </a:solidFill>
                 <a:latin typeface="Amiri" pitchFamily="2" charset="-78"/>
+                <a:ea typeface="Amiri" pitchFamily="2" charset="-78"/>
                 <a:cs typeface="Amiri" pitchFamily="2" charset="-78"/>
               </a:rPr>
               <a:t>نَمُوذَجُ الإِجَابَةِ</a:t>
@@ -27029,6 +27225,7 @@
                   <a:srgbClr val="1B3B6F"/>
                 </a:solidFill>
                 <a:latin typeface="Amiri" pitchFamily="2" charset="-78"/>
+                <a:ea typeface="Amiri" pitchFamily="2" charset="-78"/>
                 <a:cs typeface="Amiri" pitchFamily="2" charset="-78"/>
               </a:rPr>
               <a:t>نَعَمْ، مَرَّةً أُلْغِيَتْ رِحْلَتُنَا بِسَبَبِ العَاصِفَةِ، فَقَضَيْنَا اللَّيْلَةَ فِي المَطَارِ، ثُمَّ أُعِيدَ إِلَيْنَا ثَمَنُ التَّذَاكِرِ.</a:t>
@@ -27105,6 +27302,7 @@
                   <a:srgbClr val="1B3B6F"/>
                 </a:solidFill>
                 <a:latin typeface="Amiri" pitchFamily="2" charset="-78"/>
+                <a:ea typeface="Amiri" pitchFamily="2" charset="-78"/>
                 <a:cs typeface="Amiri" pitchFamily="2" charset="-78"/>
               </a:rPr>
               <a:t>هَلْ حَدَثَتْ لَكَ مُشْكِلَةٌ فِي حَجْزٍ؟</a:t>
@@ -27208,6 +27406,7 @@
                   <a:srgbClr val="1B3B6F"/>
                 </a:solidFill>
                 <a:latin typeface="Amiri" pitchFamily="2" charset="-78"/>
+                <a:ea typeface="Amiri" pitchFamily="2" charset="-78"/>
                 <a:cs typeface="Amiri" pitchFamily="2" charset="-78"/>
               </a:rPr>
               <a:t>لَوْ سُرِقَتْ بَيَانَاتِي، لَغَيَّرْتُ كُلَّ كَلِمَاتِ السِّرِّ فَوْرًا، وَلَأَبْلَغْتُ البَنْكَ وَالشُّرْطَةَ.</a:t>
@@ -27284,6 +27483,7 @@
                   <a:srgbClr val="1B3B6F"/>
                 </a:solidFill>
                 <a:latin typeface="Amiri" pitchFamily="2" charset="-78"/>
+                <a:ea typeface="Amiri" pitchFamily="2" charset="-78"/>
                 <a:cs typeface="Amiri" pitchFamily="2" charset="-78"/>
               </a:rPr>
               <a:t>لَوْ سُرِقَتْ بَيَانَاتُكَ، مَاذَا تَفْعَلُ؟</a:t>
@@ -27493,6 +27693,7 @@
                   <a:srgbClr val="D4AF37"/>
                 </a:solidFill>
                 <a:latin typeface="Amiri" pitchFamily="2" charset="-78"/>
+                <a:ea typeface="Amiri" pitchFamily="2" charset="-78"/>
                 <a:cs typeface="Amiri" pitchFamily="2" charset="-78"/>
               </a:rPr>
               <a:t>م</a:t>
@@ -27813,6 +28014,7 @@
                   <a:srgbClr val="8A6D1E"/>
                 </a:solidFill>
                 <a:latin typeface="Amiri" pitchFamily="2" charset="-78"/>
+                <a:ea typeface="Amiri" pitchFamily="2" charset="-78"/>
                 <a:cs typeface="Amiri" pitchFamily="2" charset="-78"/>
               </a:rPr>
               <a:t>قَيِّمْ عَمَلَكَ</a:t>
@@ -29057,6 +29259,7 @@
                   <a:srgbClr val="FFFFFF"/>
                 </a:solidFill>
                 <a:latin typeface="Amiri" pitchFamily="2" charset="-78"/>
+                <a:ea typeface="Amiri" pitchFamily="2" charset="-78"/>
                 <a:cs typeface="Amiri" pitchFamily="2" charset="-78"/>
               </a:rPr>
               <a:t>أَحْسَنْتُمْ! إِلَى اللِّقَاءِ</a:t>
@@ -29209,6 +29412,7 @@
                   <a:srgbClr val="D4AF37"/>
                 </a:solidFill>
                 <a:latin typeface="Amiri" pitchFamily="2" charset="-78"/>
+                <a:ea typeface="Amiri" pitchFamily="2" charset="-78"/>
                 <a:cs typeface="Amiri" pitchFamily="2" charset="-78"/>
               </a:rPr>
               <a:t>وَرْشَةُ الكِتَابَةِ</a:t>
@@ -29342,6 +29546,7 @@
                   <a:srgbClr val="D4AF37"/>
                 </a:solidFill>
                 <a:latin typeface="Amiri" pitchFamily="2" charset="-78"/>
+                <a:ea typeface="Amiri" pitchFamily="2" charset="-78"/>
                 <a:cs typeface="Amiri" pitchFamily="2" charset="-78"/>
               </a:rPr>
               <a:t>م</a:t>
@@ -29662,6 +29867,7 @@
                   <a:srgbClr val="8A6D1E"/>
                 </a:solidFill>
                 <a:latin typeface="Amiri" pitchFamily="2" charset="-78"/>
+                <a:ea typeface="Amiri" pitchFamily="2" charset="-78"/>
                 <a:cs typeface="Amiri" pitchFamily="2" charset="-78"/>
               </a:rPr>
               <a:t>خَرِيطَةُ الوَرْشَةِ</a:t>
@@ -29976,6 +30182,7 @@
                   <a:srgbClr val="1B3B6F"/>
                 </a:solidFill>
                 <a:latin typeface="Amiri" pitchFamily="2" charset="-78"/>
+                <a:ea typeface="Amiri" pitchFamily="2" charset="-78"/>
                 <a:cs typeface="Amiri" pitchFamily="2" charset="-78"/>
               </a:rPr>
               <a:t>كَيْفَ</a:t>
@@ -30252,6 +30459,7 @@
                   <a:srgbClr val="1E6B52"/>
                 </a:solidFill>
                 <a:latin typeface="Amiri" pitchFamily="2" charset="-78"/>
+                <a:ea typeface="Amiri" pitchFamily="2" charset="-78"/>
                 <a:cs typeface="Amiri" pitchFamily="2" charset="-78"/>
               </a:rPr>
               <a:t>تَمْثِيلُ الدَّوْرِ</a:t>
@@ -30528,6 +30736,7 @@
                   <a:srgbClr val="8A6D1E"/>
                 </a:solidFill>
                 <a:latin typeface="Amiri" pitchFamily="2" charset="-78"/>
+                <a:ea typeface="Amiri" pitchFamily="2" charset="-78"/>
                 <a:cs typeface="Amiri" pitchFamily="2" charset="-78"/>
               </a:rPr>
               <a:t>النَّمُوذَجُ</a:t>
@@ -30804,6 +31013,7 @@
                   <a:srgbClr val="1E6B52"/>
                 </a:solidFill>
                 <a:latin typeface="Amiri" pitchFamily="2" charset="-78"/>
+                <a:ea typeface="Amiri" pitchFamily="2" charset="-78"/>
                 <a:cs typeface="Amiri" pitchFamily="2" charset="-78"/>
               </a:rPr>
               <a:t>المُحَادَثَةُ</a:t>
@@ -31080,6 +31290,7 @@
                   <a:srgbClr val="8A6D1E"/>
                 </a:solidFill>
                 <a:latin typeface="Amiri" pitchFamily="2" charset="-78"/>
+                <a:ea typeface="Amiri" pitchFamily="2" charset="-78"/>
                 <a:cs typeface="Amiri" pitchFamily="2" charset="-78"/>
               </a:rPr>
               <a:t>قَيِّمْ</a:t>
@@ -31323,6 +31534,7 @@
                   <a:srgbClr val="D4AF37"/>
                 </a:solidFill>
                 <a:latin typeface="Amiri" pitchFamily="2" charset="-78"/>
+                <a:ea typeface="Amiri" pitchFamily="2" charset="-78"/>
                 <a:cs typeface="Amiri" pitchFamily="2" charset="-78"/>
               </a:rPr>
               <a:t>م</a:t>
@@ -31643,6 +31855,7 @@
                   <a:srgbClr val="8A6D1E"/>
                 </a:solidFill>
                 <a:latin typeface="Amiri" pitchFamily="2" charset="-78"/>
+                <a:ea typeface="Amiri" pitchFamily="2" charset="-78"/>
                 <a:cs typeface="Amiri" pitchFamily="2" charset="-78"/>
               </a:rPr>
               <a:t>امْتِحَانُ التَّحَدُّثِ</a:t>
@@ -32267,6 +32480,7 @@
                   <a:srgbClr val="1B3B6F"/>
                 </a:solidFill>
                 <a:latin typeface="Amiri" pitchFamily="2" charset="-78"/>
+                <a:ea typeface="Amiri" pitchFamily="2" charset="-78"/>
                 <a:cs typeface="Amiri" pitchFamily="2" charset="-78"/>
               </a:rPr>
               <a:t>عَفْوًا، هَلْ يُمْكِنُ أَنْ تُعِيدَ السُّؤَالَ؟</a:t>
@@ -32366,6 +32580,7 @@
                   <a:srgbClr val="1B3B6F"/>
                 </a:solidFill>
                 <a:latin typeface="Amiri" pitchFamily="2" charset="-78"/>
+                <a:ea typeface="Amiri" pitchFamily="2" charset="-78"/>
                 <a:cs typeface="Amiri" pitchFamily="2" charset="-78"/>
               </a:rPr>
               <a:t>لَحْظَةً، دَعْنِي أُفَكِّرُ …</a:t>
@@ -32465,6 +32680,7 @@
                   <a:srgbClr val="1B3B6F"/>
                 </a:solidFill>
                 <a:latin typeface="Amiri" pitchFamily="2" charset="-78"/>
+                <a:ea typeface="Amiri" pitchFamily="2" charset="-78"/>
                 <a:cs typeface="Amiri" pitchFamily="2" charset="-78"/>
               </a:rPr>
               <a:t>أَقْصِدُ …</a:t>
@@ -32636,6 +32852,7 @@
                   <a:srgbClr val="D4AF37"/>
                 </a:solidFill>
                 <a:latin typeface="Amiri" pitchFamily="2" charset="-78"/>
+                <a:ea typeface="Amiri" pitchFamily="2" charset="-78"/>
                 <a:cs typeface="Amiri" pitchFamily="2" charset="-78"/>
               </a:rPr>
               <a:t>م</a:t>
@@ -32956,6 +33173,7 @@
                   <a:srgbClr val="8A6D1E"/>
                 </a:solidFill>
                 <a:latin typeface="Amiri" pitchFamily="2" charset="-78"/>
+                <a:ea typeface="Amiri" pitchFamily="2" charset="-78"/>
                 <a:cs typeface="Amiri" pitchFamily="2" charset="-78"/>
               </a:rPr>
               <a:t>الحَجْزُ وَالإِقَامَةُ</a:t>
@@ -33259,6 +33477,7 @@
                   <a:srgbClr val="1B3B6F"/>
                 </a:solidFill>
                 <a:latin typeface="Amiri" pitchFamily="2" charset="-78"/>
+                <a:ea typeface="Amiri" pitchFamily="2" charset="-78"/>
                 <a:cs typeface="Amiri" pitchFamily="2" charset="-78"/>
               </a:rPr>
               <a:t>أَحْجِزُ</a:t>
@@ -33416,6 +33635,7 @@
                   <a:srgbClr val="1B3B6F"/>
                 </a:solidFill>
                 <a:latin typeface="Amiri" pitchFamily="2" charset="-78"/>
+                <a:ea typeface="Amiri" pitchFamily="2" charset="-78"/>
                 <a:cs typeface="Amiri" pitchFamily="2" charset="-78"/>
               </a:rPr>
               <a:t>حَجْزٌ · حُجُوزَاتٌ</a:t>
@@ -33519,6 +33739,7 @@
                   <a:srgbClr val="1B3B6F"/>
                 </a:solidFill>
                 <a:latin typeface="Amiri" pitchFamily="2" charset="-78"/>
+                <a:ea typeface="Amiri" pitchFamily="2" charset="-78"/>
                 <a:cs typeface="Amiri" pitchFamily="2" charset="-78"/>
               </a:rPr>
               <a:t>سَأَحْجِزُ</a:t>
@@ -33622,6 +33843,7 @@
                   <a:srgbClr val="1B3B6F"/>
                 </a:solidFill>
                 <a:latin typeface="Amiri" pitchFamily="2" charset="-78"/>
+                <a:ea typeface="Amiri" pitchFamily="2" charset="-78"/>
                 <a:cs typeface="Amiri" pitchFamily="2" charset="-78"/>
               </a:rPr>
               <a:t>حَجَزْتُ</a:t>
@@ -33887,6 +34109,7 @@
                   <a:srgbClr val="1B3B6F"/>
                 </a:solidFill>
                 <a:latin typeface="Amiri" pitchFamily="2" charset="-78"/>
+                <a:ea typeface="Amiri" pitchFamily="2" charset="-78"/>
                 <a:cs typeface="Amiri" pitchFamily="2" charset="-78"/>
               </a:rPr>
               <a:t>أُقِيمُ فِي …</a:t>
@@ -34044,6 +34267,7 @@
                   <a:srgbClr val="1B3B6F"/>
                 </a:solidFill>
                 <a:latin typeface="Amiri" pitchFamily="2" charset="-78"/>
+                <a:ea typeface="Amiri" pitchFamily="2" charset="-78"/>
                 <a:cs typeface="Amiri" pitchFamily="2" charset="-78"/>
               </a:rPr>
               <a:t>إِقَامَةٌ</a:t>
@@ -34147,6 +34371,7 @@
                   <a:srgbClr val="1B3B6F"/>
                 </a:solidFill>
                 <a:latin typeface="Amiri" pitchFamily="2" charset="-78"/>
+                <a:ea typeface="Amiri" pitchFamily="2" charset="-78"/>
                 <a:cs typeface="Amiri" pitchFamily="2" charset="-78"/>
               </a:rPr>
               <a:t>سَأُقِيمُ</a:t>
@@ -34250,6 +34475,7 @@
                   <a:srgbClr val="1B3B6F"/>
                 </a:solidFill>
                 <a:latin typeface="Amiri" pitchFamily="2" charset="-78"/>
+                <a:ea typeface="Amiri" pitchFamily="2" charset="-78"/>
                 <a:cs typeface="Amiri" pitchFamily="2" charset="-78"/>
               </a:rPr>
               <a:t>أَقَمْتُ</a:t>
@@ -34515,6 +34741,7 @@
                   <a:srgbClr val="1B3B6F"/>
                 </a:solidFill>
                 <a:latin typeface="Amiri" pitchFamily="2" charset="-78"/>
+                <a:ea typeface="Amiri" pitchFamily="2" charset="-78"/>
                 <a:cs typeface="Amiri" pitchFamily="2" charset="-78"/>
               </a:rPr>
               <a:t>تَذْكِرَةٌ</a:t>
@@ -34672,6 +34899,7 @@
                   <a:srgbClr val="1B3B6F"/>
                 </a:solidFill>
                 <a:latin typeface="Amiri" pitchFamily="2" charset="-78"/>
+                <a:ea typeface="Amiri" pitchFamily="2" charset="-78"/>
                 <a:cs typeface="Amiri" pitchFamily="2" charset="-78"/>
               </a:rPr>
               <a:t>ذَهَابٌ وَإِيَابٌ</a:t>
@@ -34775,6 +35003,7 @@
                   <a:srgbClr val="1B3B6F"/>
                 </a:solidFill>
                 <a:latin typeface="Amiri" pitchFamily="2" charset="-78"/>
+                <a:ea typeface="Amiri" pitchFamily="2" charset="-78"/>
                 <a:cs typeface="Amiri" pitchFamily="2" charset="-78"/>
               </a:rPr>
               <a:t>تَذَاكِرُ</a:t>
@@ -35040,6 +35269,7 @@
                   <a:srgbClr val="1B3B6F"/>
                 </a:solidFill>
                 <a:latin typeface="Amiri" pitchFamily="2" charset="-78"/>
+                <a:ea typeface="Amiri" pitchFamily="2" charset="-78"/>
                 <a:cs typeface="Amiri" pitchFamily="2" charset="-78"/>
               </a:rPr>
               <a:t>جَوَازُ السَّفَرِ</a:t>
@@ -35197,6 +35427,7 @@
                   <a:srgbClr val="1B3B6F"/>
                 </a:solidFill>
                 <a:latin typeface="Amiri" pitchFamily="2" charset="-78"/>
+                <a:ea typeface="Amiri" pitchFamily="2" charset="-78"/>
                 <a:cs typeface="Amiri" pitchFamily="2" charset="-78"/>
               </a:rPr>
               <a:t>بِطَاقَةُ الهُوِيَّةِ</a:t>
@@ -35300,6 +35531,7 @@
                   <a:srgbClr val="1B3B6F"/>
                 </a:solidFill>
                 <a:latin typeface="Amiri" pitchFamily="2" charset="-78"/>
+                <a:ea typeface="Amiri" pitchFamily="2" charset="-78"/>
                 <a:cs typeface="Amiri" pitchFamily="2" charset="-78"/>
               </a:rPr>
               <a:t>جَوَازَاتُ السَّفَرِ</a:t>
@@ -35565,6 +35797,7 @@
                   <a:srgbClr val="1B3B6F"/>
                 </a:solidFill>
                 <a:latin typeface="Amiri" pitchFamily="2" charset="-78"/>
+                <a:ea typeface="Amiri" pitchFamily="2" charset="-78"/>
                 <a:cs typeface="Amiri" pitchFamily="2" charset="-78"/>
               </a:rPr>
               <a:t>اسْتِمَارَةٌ</a:t>
@@ -35722,6 +35955,7 @@
                   <a:srgbClr val="1B3B6F"/>
                 </a:solidFill>
                 <a:latin typeface="Amiri" pitchFamily="2" charset="-78"/>
+                <a:ea typeface="Amiri" pitchFamily="2" charset="-78"/>
                 <a:cs typeface="Amiri" pitchFamily="2" charset="-78"/>
               </a:rPr>
               <a:t>امْلَأْ · امْلَئِي</a:t>
@@ -35825,6 +36059,7 @@
                   <a:srgbClr val="1B3B6F"/>
                 </a:solidFill>
                 <a:latin typeface="Amiri" pitchFamily="2" charset="-78"/>
+                <a:ea typeface="Amiri" pitchFamily="2" charset="-78"/>
                 <a:cs typeface="Amiri" pitchFamily="2" charset="-78"/>
               </a:rPr>
               <a:t>اسْتِمَارَاتٌ</a:t>
@@ -36090,6 +36325,7 @@
                   <a:srgbClr val="1B3B6F"/>
                 </a:solidFill>
                 <a:latin typeface="Amiri" pitchFamily="2" charset="-78"/>
+                <a:ea typeface="Amiri" pitchFamily="2" charset="-78"/>
                 <a:cs typeface="Amiri" pitchFamily="2" charset="-78"/>
               </a:rPr>
               <a:t>سَجِّلْ</a:t>
@@ -36247,6 +36483,7 @@
                   <a:srgbClr val="1B3B6F"/>
                 </a:solidFill>
                 <a:latin typeface="Amiri" pitchFamily="2" charset="-78"/>
+                <a:ea typeface="Amiri" pitchFamily="2" charset="-78"/>
                 <a:cs typeface="Amiri" pitchFamily="2" charset="-78"/>
               </a:rPr>
               <a:t>التَّسْجِيلُ</a:t>
@@ -36350,6 +36587,7 @@
                   <a:srgbClr val="1B3B6F"/>
                 </a:solidFill>
                 <a:latin typeface="Amiri" pitchFamily="2" charset="-78"/>
+                <a:ea typeface="Amiri" pitchFamily="2" charset="-78"/>
                 <a:cs typeface="Amiri" pitchFamily="2" charset="-78"/>
               </a:rPr>
               <a:t>سَجِّلُوا</a:t>
@@ -36453,6 +36691,7 @@
                   <a:srgbClr val="1B3B6F"/>
                 </a:solidFill>
                 <a:latin typeface="Amiri" pitchFamily="2" charset="-78"/>
+                <a:ea typeface="Amiri" pitchFamily="2" charset="-78"/>
                 <a:cs typeface="Amiri" pitchFamily="2" charset="-78"/>
               </a:rPr>
               <a:t>سَجِّلِي</a:t>
@@ -36586,6 +36825,7 @@
                   <a:srgbClr val="D4AF37"/>
                 </a:solidFill>
                 <a:latin typeface="Amiri" pitchFamily="2" charset="-78"/>
+                <a:ea typeface="Amiri" pitchFamily="2" charset="-78"/>
                 <a:cs typeface="Amiri" pitchFamily="2" charset="-78"/>
               </a:rPr>
               <a:t>م</a:t>
@@ -36906,6 +37146,7 @@
                   <a:srgbClr val="8A6D1E"/>
                 </a:solidFill>
                 <a:latin typeface="Amiri" pitchFamily="2" charset="-78"/>
+                <a:ea typeface="Amiri" pitchFamily="2" charset="-78"/>
                 <a:cs typeface="Amiri" pitchFamily="2" charset="-78"/>
               </a:rPr>
               <a:t>التَّعْلِيمَاتُ</a:t>
@@ -37209,6 +37450,7 @@
                   <a:srgbClr val="1B3B6F"/>
                 </a:solidFill>
                 <a:latin typeface="Amiri" pitchFamily="2" charset="-78"/>
+                <a:ea typeface="Amiri" pitchFamily="2" charset="-78"/>
                 <a:cs typeface="Amiri" pitchFamily="2" charset="-78"/>
               </a:rPr>
               <a:t>أَحْضِرْ</a:t>
@@ -37366,6 +37608,7 @@
                   <a:srgbClr val="1B3B6F"/>
                 </a:solidFill>
                 <a:latin typeface="Amiri" pitchFamily="2" charset="-78"/>
+                <a:ea typeface="Amiri" pitchFamily="2" charset="-78"/>
                 <a:cs typeface="Amiri" pitchFamily="2" charset="-78"/>
               </a:rPr>
               <a:t>أَحْضِرُوا</a:t>
@@ -37469,6 +37712,7 @@
                   <a:srgbClr val="1B3B6F"/>
                 </a:solidFill>
                 <a:latin typeface="Amiri" pitchFamily="2" charset="-78"/>
+                <a:ea typeface="Amiri" pitchFamily="2" charset="-78"/>
                 <a:cs typeface="Amiri" pitchFamily="2" charset="-78"/>
               </a:rPr>
               <a:t>أَحْضِرِي</a:t>
@@ -37734,6 +37978,7 @@
                   <a:srgbClr val="1B3B6F"/>
                 </a:solidFill>
                 <a:latin typeface="Amiri" pitchFamily="2" charset="-78"/>
+                <a:ea typeface="Amiri" pitchFamily="2" charset="-78"/>
                 <a:cs typeface="Amiri" pitchFamily="2" charset="-78"/>
               </a:rPr>
               <a:t>البَرِيدُ الإِلِكْتْرُونِيُّ</a:t>
@@ -37891,6 +38136,7 @@
                   <a:srgbClr val="1B3B6F"/>
                 </a:solidFill>
                 <a:latin typeface="Amiri" pitchFamily="2" charset="-78"/>
+                <a:ea typeface="Amiri" pitchFamily="2" charset="-78"/>
                 <a:cs typeface="Amiri" pitchFamily="2" charset="-78"/>
               </a:rPr>
               <a:t>العُنْوَانُ</a:t>
@@ -37994,6 +38240,7 @@
                   <a:srgbClr val="1B3B6F"/>
                 </a:solidFill>
                 <a:latin typeface="Amiri" pitchFamily="2" charset="-78"/>
+                <a:ea typeface="Amiri" pitchFamily="2" charset="-78"/>
                 <a:cs typeface="Amiri" pitchFamily="2" charset="-78"/>
               </a:rPr>
               <a:t>رِسَالَةٌ إِلِكْتْرُونِيَّةٌ</a:t>
@@ -38259,6 +38506,7 @@
                   <a:srgbClr val="1B3B6F"/>
                 </a:solidFill>
                 <a:latin typeface="Amiri" pitchFamily="2" charset="-78"/>
+                <a:ea typeface="Amiri" pitchFamily="2" charset="-78"/>
                 <a:cs typeface="Amiri" pitchFamily="2" charset="-78"/>
               </a:rPr>
               <a:t>رَقْمُ الهَاتِفِ</a:t>
@@ -38416,6 +38664,7 @@
                   <a:srgbClr val="1B3B6F"/>
                 </a:solidFill>
                 <a:latin typeface="Amiri" pitchFamily="2" charset="-78"/>
+                <a:ea typeface="Amiri" pitchFamily="2" charset="-78"/>
                 <a:cs typeface="Amiri" pitchFamily="2" charset="-78"/>
               </a:rPr>
               <a:t>الجِنْسِيَّةُ</a:t>
@@ -38519,6 +38768,7 @@
                   <a:srgbClr val="1B3B6F"/>
                 </a:solidFill>
                 <a:latin typeface="Amiri" pitchFamily="2" charset="-78"/>
+                <a:ea typeface="Amiri" pitchFamily="2" charset="-78"/>
                 <a:cs typeface="Amiri" pitchFamily="2" charset="-78"/>
               </a:rPr>
               <a:t>تَارِيخُ المِيلَادِ</a:t>
@@ -38784,6 +39034,7 @@
                   <a:srgbClr val="1B3B6F"/>
                 </a:solidFill>
                 <a:latin typeface="Amiri" pitchFamily="2" charset="-78"/>
+                <a:ea typeface="Amiri" pitchFamily="2" charset="-78"/>
                 <a:cs typeface="Amiri" pitchFamily="2" charset="-78"/>
               </a:rPr>
               <a:t>يُرْسَلُ · تُرْسَلُ</a:t>
@@ -38941,6 +39192,7 @@
                   <a:srgbClr val="1B3B6F"/>
                 </a:solidFill>
                 <a:latin typeface="Amiri" pitchFamily="2" charset="-78"/>
+                <a:ea typeface="Amiri" pitchFamily="2" charset="-78"/>
                 <a:cs typeface="Amiri" pitchFamily="2" charset="-78"/>
               </a:rPr>
               <a:t>تُقْبَلُ</a:t>
@@ -39044,6 +39296,7 @@
                   <a:srgbClr val="1B3B6F"/>
                 </a:solidFill>
                 <a:latin typeface="Amiri" pitchFamily="2" charset="-78"/>
+                <a:ea typeface="Amiri" pitchFamily="2" charset="-78"/>
                 <a:cs typeface="Amiri" pitchFamily="2" charset="-78"/>
               </a:rPr>
               <a:t>يُرْسِلُ</a:t>
@@ -39309,6 +39562,7 @@
                   <a:srgbClr val="1B3B6F"/>
                 </a:solidFill>
                 <a:latin typeface="Amiri" pitchFamily="2" charset="-78"/>
+                <a:ea typeface="Amiri" pitchFamily="2" charset="-78"/>
                 <a:cs typeface="Amiri" pitchFamily="2" charset="-78"/>
               </a:rPr>
               <a:t>مُؤَكَّدٌ</a:t>
@@ -39466,6 +39720,7 @@
                   <a:srgbClr val="1B3B6F"/>
                 </a:solidFill>
                 <a:latin typeface="Amiri" pitchFamily="2" charset="-78"/>
+                <a:ea typeface="Amiri" pitchFamily="2" charset="-78"/>
                 <a:cs typeface="Amiri" pitchFamily="2" charset="-78"/>
               </a:rPr>
               <a:t>تَأْكِيدٌ</a:t>
@@ -39569,6 +39824,7 @@
                   <a:srgbClr val="1B3B6F"/>
                 </a:solidFill>
                 <a:latin typeface="Amiri" pitchFamily="2" charset="-78"/>
+                <a:ea typeface="Amiri" pitchFamily="2" charset="-78"/>
                 <a:cs typeface="Amiri" pitchFamily="2" charset="-78"/>
               </a:rPr>
               <a:t>مُؤَكَّدَةٌ</a:t>
@@ -39834,6 +40090,7 @@
                   <a:srgbClr val="1B3B6F"/>
                 </a:solidFill>
                 <a:latin typeface="Amiri" pitchFamily="2" charset="-78"/>
+                <a:ea typeface="Amiri" pitchFamily="2" charset="-78"/>
                 <a:cs typeface="Amiri" pitchFamily="2" charset="-78"/>
               </a:rPr>
               <a:t>الَّذِي · الَّتِي · الَّذِينَ</a:t>
@@ -39883,11 +40140,12 @@
               <a:buNone/>
             </a:pPr>
             <a:r>
-              <a:rPr lang="en-US" sz="1100" i="1" dirty="0">
+              <a:rPr lang="ar-SA" sz="1100" i="1" dirty="0">
                 <a:solidFill>
                   <a:srgbClr val="5A6472"/>
                 </a:solidFill>
                 <a:latin typeface="Calibri" pitchFamily="34" charset="0"/>
+                <a:ea typeface="Amiri" pitchFamily="2" charset="-78"/>
                 <a:cs typeface="Amiri" pitchFamily="2" charset="-78"/>
               </a:rPr>
               <a:t>al-َ-dhī · al-َ-tī · al-َ-dhī-na</a:t>
@@ -39991,6 +40249,7 @@
                   <a:srgbClr val="1B3B6F"/>
                 </a:solidFill>
                 <a:latin typeface="Amiri" pitchFamily="2" charset="-78"/>
+                <a:ea typeface="Amiri" pitchFamily="2" charset="-78"/>
                 <a:cs typeface="Amiri" pitchFamily="2" charset="-78"/>
               </a:rPr>
               <a:t>الغُرْفَةُ الَّتِي حَجَزْتُهَا</a:t>
@@ -40124,6 +40383,7 @@
                   <a:srgbClr val="D4AF37"/>
                 </a:solidFill>
                 <a:latin typeface="Amiri" pitchFamily="2" charset="-78"/>
+                <a:ea typeface="Amiri" pitchFamily="2" charset="-78"/>
                 <a:cs typeface="Amiri" pitchFamily="2" charset="-78"/>
               </a:rPr>
               <a:t>م</a:t>
@@ -40444,6 +40704,7 @@
                   <a:srgbClr val="8A6D1E"/>
                 </a:solidFill>
                 <a:latin typeface="Amiri" pitchFamily="2" charset="-78"/>
+                <a:ea typeface="Amiri" pitchFamily="2" charset="-78"/>
                 <a:cs typeface="Amiri" pitchFamily="2" charset="-78"/>
               </a:rPr>
               <a:t>فِي الغُرَفِ</a:t>
@@ -41620,6 +41881,7 @@
                   <a:srgbClr val="1B3B6F"/>
                 </a:solidFill>
                 <a:latin typeface="Amiri" pitchFamily="2" charset="-78"/>
+                <a:ea typeface="Amiri" pitchFamily="2" charset="-78"/>
                 <a:cs typeface="Amiri" pitchFamily="2" charset="-78"/>
               </a:rPr>
               <a:t>دَوْرُكَ!</a:t>
@@ -41696,6 +41958,7 @@
                   <a:srgbClr val="1B3B6F"/>
                 </a:solidFill>
                 <a:latin typeface="Amiri" pitchFamily="2" charset="-78"/>
+                <a:ea typeface="Amiri" pitchFamily="2" charset="-78"/>
                 <a:cs typeface="Amiri" pitchFamily="2" charset="-78"/>
               </a:rPr>
               <a:t>أَحْسَنْتَ! / أَحْسَنْتِ!</a:t>
@@ -41772,6 +42035,7 @@
                   <a:srgbClr val="1B3B6F"/>
                 </a:solidFill>
                 <a:latin typeface="Amiri" pitchFamily="2" charset="-78"/>
+                <a:ea typeface="Amiri" pitchFamily="2" charset="-78"/>
                 <a:cs typeface="Amiri" pitchFamily="2" charset="-78"/>
               </a:rPr>
               <a:t>تَكَلَّمْ أَكْثَرَ، مِنْ فَضْلِكَ</a:t>
@@ -41848,6 +42112,7 @@
                   <a:srgbClr val="1B3B6F"/>
                 </a:solidFill>
                 <a:latin typeface="Amiri" pitchFamily="2" charset="-78"/>
+                <a:ea typeface="Amiri" pitchFamily="2" charset="-78"/>
                 <a:cs typeface="Amiri" pitchFamily="2" charset="-78"/>
               </a:rPr>
               <a:t>لِمَاذَا؟</a:t>
@@ -42019,6 +42284,7 @@
                   <a:srgbClr val="D4AF37"/>
                 </a:solidFill>
                 <a:latin typeface="Amiri" pitchFamily="2" charset="-78"/>
+                <a:ea typeface="Amiri" pitchFamily="2" charset="-78"/>
                 <a:cs typeface="Amiri" pitchFamily="2" charset="-78"/>
               </a:rPr>
               <a:t>م</a:t>
@@ -42339,6 +42605,7 @@
                   <a:srgbClr val="8A6D1E"/>
                 </a:solidFill>
                 <a:latin typeface="Amiri" pitchFamily="2" charset="-78"/>
+                <a:ea typeface="Amiri" pitchFamily="2" charset="-78"/>
                 <a:cs typeface="Amiri" pitchFamily="2" charset="-78"/>
               </a:rPr>
               <a:t>فِي اسْتِقْبَالِ الفُنْدُقِ</a:t>
@@ -42619,6 +42886,7 @@
                   <a:srgbClr val="1B3B6F"/>
                 </a:solidFill>
                 <a:latin typeface="Amiri" pitchFamily="2" charset="-78"/>
+                <a:ea typeface="Amiri" pitchFamily="2" charset="-78"/>
                 <a:cs typeface="Amiri" pitchFamily="2" charset="-78"/>
               </a:rPr>
               <a:t>عِنْدِي حَجْزٌ بِاسْمِ …</a:t>
@@ -42695,6 +42963,7 @@
                   <a:srgbClr val="1B3B6F"/>
                 </a:solidFill>
                 <a:latin typeface="Amiri" pitchFamily="2" charset="-78"/>
+                <a:ea typeface="Amiri" pitchFamily="2" charset="-78"/>
                 <a:cs typeface="Amiri" pitchFamily="2" charset="-78"/>
               </a:rPr>
               <a:t>مَسَاءَ الخَيْرِ! كَيْفَ أُسَاعِدُكَ؟</a:t>
@@ -42863,6 +43132,7 @@
                   <a:srgbClr val="1B3B6F"/>
                 </a:solidFill>
                 <a:latin typeface="Amiri" pitchFamily="2" charset="-78"/>
+                <a:ea typeface="Amiri" pitchFamily="2" charset="-78"/>
                 <a:cs typeface="Amiri" pitchFamily="2" charset="-78"/>
               </a:rPr>
               <a:t>سَأُقِيمُ … لَيَالٍ</a:t>
@@ -42939,6 +43209,7 @@
                   <a:srgbClr val="1B3B6F"/>
                 </a:solidFill>
                 <a:latin typeface="Amiri" pitchFamily="2" charset="-78"/>
+                <a:ea typeface="Amiri" pitchFamily="2" charset="-78"/>
                 <a:cs typeface="Amiri" pitchFamily="2" charset="-78"/>
               </a:rPr>
               <a:t>كَمْ لَيْلَةً سَتُقِيمُ عِنْدَنَا؟</a:t>
@@ -43107,6 +43378,7 @@
                   <a:srgbClr val="1B3B6F"/>
                 </a:solidFill>
                 <a:latin typeface="Amiri" pitchFamily="2" charset="-78"/>
+                <a:ea typeface="Amiri" pitchFamily="2" charset="-78"/>
                 <a:cs typeface="Amiri" pitchFamily="2" charset="-78"/>
               </a:rPr>
               <a:t>تَفَضَّلْ، هٰذَا …</a:t>
@@ -43183,6 +43455,7 @@
                   <a:srgbClr val="1B3B6F"/>
                 </a:solidFill>
                 <a:latin typeface="Amiri" pitchFamily="2" charset="-78"/>
+                <a:ea typeface="Amiri" pitchFamily="2" charset="-78"/>
                 <a:cs typeface="Amiri" pitchFamily="2" charset="-78"/>
               </a:rPr>
               <a:t>جَوَازَ السَّفَرِ مِنْ فَضْلِكَ.</a:t>
@@ -43351,6 +43624,7 @@
                   <a:srgbClr val="1B3B6F"/>
                 </a:solidFill>
                 <a:latin typeface="Amiri" pitchFamily="2" charset="-78"/>
+                <a:ea typeface="Amiri" pitchFamily="2" charset="-78"/>
                 <a:cs typeface="Amiri" pitchFamily="2" charset="-78"/>
               </a:rPr>
               <a:t>مَتَى …؟</a:t>
@@ -43427,6 +43701,7 @@
                   <a:srgbClr val="1B3B6F"/>
                 </a:solidFill>
                 <a:latin typeface="Amiri" pitchFamily="2" charset="-78"/>
+                <a:ea typeface="Amiri" pitchFamily="2" charset="-78"/>
                 <a:cs typeface="Amiri" pitchFamily="2" charset="-78"/>
               </a:rPr>
               <a:t>غُرْفَتُكَ فِي الطَّابِقِ الرَّابِعِ.</a:t>
@@ -43595,6 +43870,7 @@
                   <a:srgbClr val="1B3B6F"/>
                 </a:solidFill>
                 <a:latin typeface="Amiri" pitchFamily="2" charset="-78"/>
+                <a:ea typeface="Amiri" pitchFamily="2" charset="-78"/>
                 <a:cs typeface="Amiri" pitchFamily="2" charset="-78"/>
               </a:rPr>
               <a:t>رَقْمُ هَاتِفِي …</a:t>
@@ -43671,6 +43947,7 @@
                   <a:srgbClr val="1B3B6F"/>
                 </a:solidFill>
                 <a:latin typeface="Amiri" pitchFamily="2" charset="-78"/>
+                <a:ea typeface="Amiri" pitchFamily="2" charset="-78"/>
                 <a:cs typeface="Amiri" pitchFamily="2" charset="-78"/>
               </a:rPr>
               <a:t>مَا رَقْمُ هَاتِفِكَ؟</a:t>
@@ -43945,6 +44222,7 @@
                   <a:srgbClr val="D4AF37"/>
                 </a:solidFill>
                 <a:latin typeface="Amiri" pitchFamily="2" charset="-78"/>
+                <a:ea typeface="Amiri" pitchFamily="2" charset="-78"/>
                 <a:cs typeface="Amiri" pitchFamily="2" charset="-78"/>
               </a:rPr>
               <a:t>م</a:t>
@@ -44265,6 +44543,7 @@
                   <a:srgbClr val="8A6D1E"/>
                 </a:solidFill>
                 <a:latin typeface="Amiri" pitchFamily="2" charset="-78"/>
+                <a:ea typeface="Amiri" pitchFamily="2" charset="-78"/>
                 <a:cs typeface="Amiri" pitchFamily="2" charset="-78"/>
               </a:rPr>
               <a:t>حَجْزُ تَذَاكِرِ القِطَارِ</a:t>
@@ -44545,6 +44824,7 @@
                   <a:srgbClr val="1B3B6F"/>
                 </a:solidFill>
                 <a:latin typeface="Amiri" pitchFamily="2" charset="-78"/>
+                <a:ea typeface="Amiri" pitchFamily="2" charset="-78"/>
                 <a:cs typeface="Amiri" pitchFamily="2" charset="-78"/>
               </a:rPr>
               <a:t>أُرِيدُ أَنْ أُسَافِرَ إِلَى … يَوْمَ …</a:t>
@@ -44621,6 +44901,7 @@
                   <a:srgbClr val="1B3B6F"/>
                 </a:solidFill>
                 <a:latin typeface="Amiri" pitchFamily="2" charset="-78"/>
+                <a:ea typeface="Amiri" pitchFamily="2" charset="-78"/>
                 <a:cs typeface="Amiri" pitchFamily="2" charset="-78"/>
               </a:rPr>
               <a:t>أَهْلًا، إِلَى أَيْنَ تُرِيدُ أَنْ تُسَافِرَ؟</a:t>
@@ -44789,6 +45070,7 @@
                   <a:srgbClr val="1B3B6F"/>
                 </a:solidFill>
                 <a:latin typeface="Amiri" pitchFamily="2" charset="-78"/>
+                <a:ea typeface="Amiri" pitchFamily="2" charset="-78"/>
                 <a:cs typeface="Amiri" pitchFamily="2" charset="-78"/>
               </a:rPr>
               <a:t>لَا، ذَهَابٌ وَإِيَابٌ، … تَذَاكِرَ</a:t>
@@ -44865,6 +45147,7 @@
                   <a:srgbClr val="1B3B6F"/>
                 </a:solidFill>
                 <a:latin typeface="Amiri" pitchFamily="2" charset="-78"/>
+                <a:ea typeface="Amiri" pitchFamily="2" charset="-78"/>
                 <a:cs typeface="Amiri" pitchFamily="2" charset="-78"/>
               </a:rPr>
               <a:t>ذَهَابٌ فَقَطْ؟</a:t>
@@ -45033,6 +45316,7 @@
                   <a:srgbClr val="1B3B6F"/>
                 </a:solidFill>
                 <a:latin typeface="Amiri" pitchFamily="2" charset="-78"/>
+                <a:ea typeface="Amiri" pitchFamily="2" charset="-78"/>
                 <a:cs typeface="Amiri" pitchFamily="2" charset="-78"/>
               </a:rPr>
               <a:t>مَا الفَرْقُ …؟</a:t>
@@ -45109,6 +45393,7 @@
                   <a:srgbClr val="1B3B6F"/>
                 </a:solidFill>
                 <a:latin typeface="Amiri" pitchFamily="2" charset="-78"/>
+                <a:ea typeface="Amiri" pitchFamily="2" charset="-78"/>
                 <a:cs typeface="Amiri" pitchFamily="2" charset="-78"/>
               </a:rPr>
               <a:t>هُنَاكَ قِطَارٌ فِي السَّاعَةِ الثَّامِنَةِ، وَقِطَارٌ فِي الظُّهْرِ.</a:t>
@@ -45212,6 +45497,7 @@
                   <a:srgbClr val="1B3B6F"/>
                 </a:solidFill>
                 <a:latin typeface="Amiri" pitchFamily="2" charset="-78"/>
+                <a:ea typeface="Amiri" pitchFamily="2" charset="-78"/>
                 <a:cs typeface="Amiri" pitchFamily="2" charset="-78"/>
               </a:rPr>
               <a:t>سَأَحْجِزُ … لِأَنَّ …</a:t>
@@ -45288,6 +45574,7 @@
                   <a:srgbClr val="1B3B6F"/>
                 </a:solidFill>
                 <a:latin typeface="Amiri" pitchFamily="2" charset="-78"/>
+                <a:ea typeface="Amiri" pitchFamily="2" charset="-78"/>
                 <a:cs typeface="Amiri" pitchFamily="2" charset="-78"/>
               </a:rPr>
               <a:t>قِطَارُ الثَّامِنَةِ أَسْرَعُ، لٰكِنَّهُ أَغْلَى.</a:t>
@@ -45391,6 +45678,7 @@
                   <a:srgbClr val="1B3B6F"/>
                 </a:solidFill>
                 <a:latin typeface="Amiri" pitchFamily="2" charset="-78"/>
+                <a:ea typeface="Amiri" pitchFamily="2" charset="-78"/>
                 <a:cs typeface="Amiri" pitchFamily="2" charset="-78"/>
               </a:rPr>
               <a:t>أَرْجُو أَنْ تُرْسَلَ …</a:t>
@@ -45467,6 +45755,7 @@
                   <a:srgbClr val="1B3B6F"/>
                 </a:solidFill>
                 <a:latin typeface="Amiri" pitchFamily="2" charset="-78"/>
+                <a:ea typeface="Amiri" pitchFamily="2" charset="-78"/>
                 <a:cs typeface="Amiri" pitchFamily="2" charset="-78"/>
               </a:rPr>
               <a:t>كَيْفَ تُرِيدُ أَنْ تَسْتَلِمَ التَّذَاكِرَ؟</a:t>
@@ -45641,13 +45930,9 @@
     <a:fontScheme name="Office">
       <a:majorFont>
         <a:latin typeface="Calibri Light" panose="020F0302020204030204"/>
-        <a:ea typeface=""/>
-        <a:cs typeface=""/>
-        <a:font script="Jpan" typeface="游ゴシック Light"/>
-        <a:font script="Hang" typeface="맑은 고딕"/>
-        <a:font script="Hans" typeface="等线 Light"/>
-        <a:font script="Hant" typeface="新細明體"/>
-        <a:font script="Arab" typeface="Times New Roman"/>
+        <a:ea typeface="Amiri" pitchFamily="2" charset="-78"/>
+        <a:cs typeface="Amiri" pitchFamily="2" charset="-78"/>
+        <a:font script="Arab" typeface="Amiri"/>
         <a:font script="Hebr" typeface="Times New Roman"/>
         <a:font script="Thai" typeface="Angsana New"/>
         <a:font script="Ethi" typeface="Nyala"/>
@@ -45693,13 +45978,9 @@
       </a:majorFont>
       <a:minorFont>
         <a:latin typeface="Calibri" panose="020F0502020204030204"/>
-        <a:ea typeface=""/>
-        <a:cs typeface=""/>
-        <a:font script="Jpan" typeface="游ゴシック"/>
-        <a:font script="Hang" typeface="맑은 고딕"/>
-        <a:font script="Hans" typeface="等线"/>
-        <a:font script="Hant" typeface="新細明體"/>
-        <a:font script="Arab" typeface="Arial"/>
+        <a:ea typeface="Amiri" pitchFamily="2" charset="-78"/>
+        <a:cs typeface="Amiri" pitchFamily="2" charset="-78"/>
+        <a:font script="Arab" typeface="Amiri"/>
         <a:font script="Hebr" typeface="Arial"/>
         <a:font script="Thai" typeface="Cordia New"/>
         <a:font script="Ethi" typeface="Nyala"/>
